--- a/Vision.pptx
+++ b/Vision.pptx
@@ -5,19 +5,20 @@
     <p:sldMasterId id="2147483648" r:id="rId1"/>
   </p:sldMasterIdLst>
   <p:notesMasterIdLst>
-    <p:notesMasterId r:id="rId9"/>
+    <p:notesMasterId r:id="rId10"/>
   </p:notesMasterIdLst>
   <p:handoutMasterIdLst>
-    <p:handoutMasterId r:id="rId10"/>
+    <p:handoutMasterId r:id="rId11"/>
   </p:handoutMasterIdLst>
   <p:sldIdLst>
     <p:sldId id="261" r:id="rId2"/>
     <p:sldId id="262" r:id="rId3"/>
     <p:sldId id="265" r:id="rId4"/>
-    <p:sldId id="263" r:id="rId5"/>
-    <p:sldId id="264" r:id="rId6"/>
-    <p:sldId id="260" r:id="rId7"/>
-    <p:sldId id="258" r:id="rId8"/>
+    <p:sldId id="264" r:id="rId5"/>
+    <p:sldId id="263" r:id="rId6"/>
+    <p:sldId id="266" r:id="rId7"/>
+    <p:sldId id="260" r:id="rId8"/>
+    <p:sldId id="258" r:id="rId9"/>
   </p:sldIdLst>
   <p:sldSz cx="12192000" cy="6858000"/>
   <p:notesSz cx="6858000" cy="9144000"/>
@@ -29357,16 +29358,13 @@
           <a:p>
             <a:r>
               <a:rPr lang="en-US" dirty="0"/>
-              <a:t>Malte Wegener, Boris Diskin, Dimitry Kamenetsky, Mike Park, Axel Schwöppe, Mohamed </a:t>
+              <a:t>Malte Wegener, Prahladh Iyer, Boris Diskin, Dimitry Kamenetsky, Mike Park, Axel Schwöppe, Mohamed </a:t>
             </a:r>
             <a:r>
               <a:rPr lang="en-US" dirty="0" err="1"/>
               <a:t>Sereez</a:t>
             </a:r>
-            <a:r>
-              <a:rPr lang="en-US" dirty="0"/>
-              <a:t>, …</a:t>
-            </a:r>
+            <a:endParaRPr lang="en-US" dirty="0"/>
           </a:p>
         </p:txBody>
       </p:sp>
@@ -29843,7 +29841,7 @@
           <a:p>
             <a:r>
               <a:rPr lang="en-US" dirty="0"/>
-              <a:t>Is the spread between solvers a sign of the non-uniqueness of the RANS equations </a:t>
+              <a:t>Is the spread between solvers a sign of the non-uniqueness of the RANS equations?</a:t>
             </a:r>
           </a:p>
         </p:txBody>
@@ -29976,237 +29974,6 @@
           <p:cNvPr id="2" name="Title 1">
             <a:extLst>
               <a:ext uri="{FF2B5EF4-FFF2-40B4-BE49-F238E27FC236}">
-                <a16:creationId xmlns:a16="http://schemas.microsoft.com/office/drawing/2014/main" id="{F416E67C-5737-DA4A-972E-0BC0A218EFF7}"/>
-              </a:ext>
-            </a:extLst>
-          </p:cNvPr>
-          <p:cNvSpPr>
-            <a:spLocks noGrp="1"/>
-          </p:cNvSpPr>
-          <p:nvPr>
-            <p:ph type="title"/>
-          </p:nvPr>
-        </p:nvSpPr>
-        <p:spPr/>
-        <p:txBody>
-          <a:bodyPr/>
-          <a:lstStyle/>
-          <a:p>
-            <a:r>
-              <a:rPr lang="en-US" dirty="0"/>
-              <a:t>Spatial convergence at 25 degrees</a:t>
-            </a:r>
-          </a:p>
-        </p:txBody>
-      </p:sp>
-      <p:sp>
-        <p:nvSpPr>
-          <p:cNvPr id="3" name="Content Placeholder 2">
-            <a:extLst>
-              <a:ext uri="{FF2B5EF4-FFF2-40B4-BE49-F238E27FC236}">
-                <a16:creationId xmlns:a16="http://schemas.microsoft.com/office/drawing/2014/main" id="{064FEDD7-7E9F-689A-E6E3-3D8CACEEFA46}"/>
-              </a:ext>
-            </a:extLst>
-          </p:cNvPr>
-          <p:cNvSpPr>
-            <a:spLocks noGrp="1"/>
-          </p:cNvSpPr>
-          <p:nvPr>
-            <p:ph idx="1"/>
-          </p:nvPr>
-        </p:nvSpPr>
-        <p:spPr>
-          <a:xfrm>
-            <a:off x="695326" y="1627200"/>
-            <a:ext cx="4859624" cy="4895850"/>
-          </a:xfrm>
-        </p:spPr>
-        <p:txBody>
-          <a:bodyPr/>
-          <a:lstStyle/>
-          <a:p>
-            <a:r>
-              <a:rPr lang="en-US" dirty="0"/>
-              <a:t>Two clusters of solutions can be identified for 25 degrees</a:t>
-            </a:r>
-          </a:p>
-          <a:p>
-            <a:r>
-              <a:rPr lang="en-US" dirty="0"/>
-              <a:t>Even though more solutions exist for the high-lift solution, the spread between different codes is similar for both solutions</a:t>
-            </a:r>
-          </a:p>
-        </p:txBody>
-      </p:sp>
-      <p:sp>
-        <p:nvSpPr>
-          <p:cNvPr id="4" name="Slide Number Placeholder 3">
-            <a:extLst>
-              <a:ext uri="{FF2B5EF4-FFF2-40B4-BE49-F238E27FC236}">
-                <a16:creationId xmlns:a16="http://schemas.microsoft.com/office/drawing/2014/main" id="{C39C324B-7B8D-6546-ACDE-DC8D9DA92FCA}"/>
-              </a:ext>
-            </a:extLst>
-          </p:cNvPr>
-          <p:cNvSpPr>
-            <a:spLocks noGrp="1"/>
-          </p:cNvSpPr>
-          <p:nvPr>
-            <p:ph type="sldNum" sz="quarter" idx="10"/>
-          </p:nvPr>
-        </p:nvSpPr>
-        <p:spPr/>
-        <p:txBody>
-          <a:bodyPr/>
-          <a:lstStyle/>
-          <a:p>
-            <a:fld id="{30ADABB7-F9A6-4A4D-9415-296AC5E687F8}" type="slidenum">
-              <a:rPr lang="de-DE" smtClean="0"/>
-              <a:pPr/>
-              <a:t>4</a:t>
-            </a:fld>
-            <a:endParaRPr lang="de-DE"/>
-          </a:p>
-        </p:txBody>
-      </p:sp>
-      <p:sp>
-        <p:nvSpPr>
-          <p:cNvPr id="5" name="Footer Placeholder 4">
-            <a:extLst>
-              <a:ext uri="{FF2B5EF4-FFF2-40B4-BE49-F238E27FC236}">
-                <a16:creationId xmlns:a16="http://schemas.microsoft.com/office/drawing/2014/main" id="{1FF0599F-A936-C267-D90F-DD2316DE0375}"/>
-              </a:ext>
-            </a:extLst>
-          </p:cNvPr>
-          <p:cNvSpPr>
-            <a:spLocks noGrp="1"/>
-          </p:cNvSpPr>
-          <p:nvPr>
-            <p:ph type="ftr" sz="quarter" idx="11"/>
-          </p:nvPr>
-        </p:nvSpPr>
-        <p:spPr/>
-        <p:txBody>
-          <a:bodyPr/>
-          <a:lstStyle/>
-          <a:p>
-            <a:r>
-              <a:rPr lang="en-US"/>
-              <a:t>Name of lecturer, institute, date</a:t>
-            </a:r>
-            <a:endParaRPr lang="de-DE" dirty="0"/>
-          </a:p>
-        </p:txBody>
-      </p:sp>
-      <p:pic>
-        <p:nvPicPr>
-          <p:cNvPr id="9" name="Picture 8">
-            <a:extLst>
-              <a:ext uri="{FF2B5EF4-FFF2-40B4-BE49-F238E27FC236}">
-                <a16:creationId xmlns:a16="http://schemas.microsoft.com/office/drawing/2014/main" id="{6E3588A6-C0DF-CDCB-1694-47EF6CE725AD}"/>
-              </a:ext>
-            </a:extLst>
-          </p:cNvPr>
-          <p:cNvPicPr>
-            <a:picLocks noChangeAspect="1"/>
-          </p:cNvPicPr>
-          <p:nvPr/>
-        </p:nvPicPr>
-        <p:blipFill>
-          <a:blip r:embed="rId2">
-            <a:extLst>
-              <a:ext uri="{28A0092B-C50C-407E-A947-70E740481C1C}">
-                <a14:useLocalDpi xmlns:a14="http://schemas.microsoft.com/office/drawing/2010/main" val="0"/>
-              </a:ext>
-            </a:extLst>
-          </a:blip>
-          <a:stretch>
-            <a:fillRect/>
-          </a:stretch>
-        </p:blipFill>
-        <p:spPr>
-          <a:xfrm>
-            <a:off x="5554949" y="1318661"/>
-            <a:ext cx="5612923" cy="4989717"/>
-          </a:xfrm>
-          <a:prstGeom prst="rect">
-            <a:avLst/>
-          </a:prstGeom>
-        </p:spPr>
-      </p:pic>
-      <p:sp>
-        <p:nvSpPr>
-          <p:cNvPr id="10" name="TextBox 9">
-            <a:extLst>
-              <a:ext uri="{FF2B5EF4-FFF2-40B4-BE49-F238E27FC236}">
-                <a16:creationId xmlns:a16="http://schemas.microsoft.com/office/drawing/2014/main" id="{52C59866-38E0-C29E-751C-1906C697EC4F}"/>
-              </a:ext>
-            </a:extLst>
-          </p:cNvPr>
-          <p:cNvSpPr txBox="1"/>
-          <p:nvPr/>
-        </p:nvSpPr>
-        <p:spPr>
-          <a:xfrm>
-            <a:off x="6851904" y="3700272"/>
-            <a:ext cx="3974592" cy="584775"/>
-          </a:xfrm>
-          <a:prstGeom prst="rect">
-            <a:avLst/>
-          </a:prstGeom>
-          <a:noFill/>
-        </p:spPr>
-        <p:txBody>
-          <a:bodyPr wrap="square" rtlCol="0">
-            <a:spAutoFit/>
-          </a:bodyPr>
-          <a:lstStyle/>
-          <a:p>
-            <a:r>
-              <a:rPr lang="en-US" sz="3200" dirty="0">
-                <a:solidFill>
-                  <a:srgbClr val="FF0000"/>
-                </a:solidFill>
-              </a:rPr>
-              <a:t>TEMPORARY</a:t>
-            </a:r>
-          </a:p>
-        </p:txBody>
-      </p:sp>
-    </p:spTree>
-    <p:extLst>
-      <p:ext uri="{BB962C8B-B14F-4D97-AF65-F5344CB8AC3E}">
-        <p14:creationId xmlns:p14="http://schemas.microsoft.com/office/powerpoint/2010/main" val="3376406342"/>
-      </p:ext>
-    </p:extLst>
-  </p:cSld>
-  <p:clrMapOvr>
-    <a:masterClrMapping/>
-  </p:clrMapOvr>
-</p:sld>
-</file>
-
-<file path=ppt/slides/slide5.xml><?xml version="1.0" encoding="utf-8"?>
-<p:sld xmlns:a="http://schemas.openxmlformats.org/drawingml/2006/main" xmlns:r="http://schemas.openxmlformats.org/officeDocument/2006/relationships" xmlns:p="http://schemas.openxmlformats.org/presentationml/2006/main">
-  <p:cSld>
-    <p:spTree>
-      <p:nvGrpSpPr>
-        <p:cNvPr id="1" name=""/>
-        <p:cNvGrpSpPr/>
-        <p:nvPr/>
-      </p:nvGrpSpPr>
-      <p:grpSpPr>
-        <a:xfrm>
-          <a:off x="0" y="0"/>
-          <a:ext cx="0" cy="0"/>
-          <a:chOff x="0" y="0"/>
-          <a:chExt cx="0" cy="0"/>
-        </a:xfrm>
-      </p:grpSpPr>
-      <p:sp>
-        <p:nvSpPr>
-          <p:cNvPr id="2" name="Title 1">
-            <a:extLst>
-              <a:ext uri="{FF2B5EF4-FFF2-40B4-BE49-F238E27FC236}">
                 <a16:creationId xmlns:a16="http://schemas.microsoft.com/office/drawing/2014/main" id="{777CD359-B654-41FE-51DC-72F205322D5C}"/>
               </a:ext>
             </a:extLst>
@@ -30299,7 +30066,7 @@
             <a:fld id="{30ADABB7-F9A6-4A4D-9415-296AC5E687F8}" type="slidenum">
               <a:rPr lang="de-DE" smtClean="0"/>
               <a:pPr/>
-              <a:t>5</a:t>
+              <a:t>4</a:t>
             </a:fld>
             <a:endParaRPr lang="de-DE"/>
           </a:p>
@@ -30831,10 +30598,329 @@
           </a:fontRef>
         </p:style>
       </p:cxnSp>
+      <p:sp>
+        <p:nvSpPr>
+          <p:cNvPr id="44" name="Oval 43">
+            <a:extLst>
+              <a:ext uri="{FF2B5EF4-FFF2-40B4-BE49-F238E27FC236}">
+                <a16:creationId xmlns:a16="http://schemas.microsoft.com/office/drawing/2014/main" id="{1CE1672C-DAAE-9494-952B-5BA0154EA5B3}"/>
+              </a:ext>
+            </a:extLst>
+          </p:cNvPr>
+          <p:cNvSpPr/>
+          <p:nvPr/>
+        </p:nvSpPr>
+        <p:spPr>
+          <a:xfrm>
+            <a:off x="7551420" y="2948940"/>
+            <a:ext cx="455467" cy="1352714"/>
+          </a:xfrm>
+          <a:prstGeom prst="ellipse">
+            <a:avLst/>
+          </a:prstGeom>
+          <a:noFill/>
+          <a:ln w="38100">
+            <a:solidFill>
+              <a:srgbClr val="FF0000"/>
+            </a:solidFill>
+          </a:ln>
+        </p:spPr>
+        <p:style>
+          <a:lnRef idx="2">
+            <a:schemeClr val="accent1">
+              <a:shade val="15000"/>
+            </a:schemeClr>
+          </a:lnRef>
+          <a:fillRef idx="1">
+            <a:schemeClr val="accent1"/>
+          </a:fillRef>
+          <a:effectRef idx="0">
+            <a:schemeClr val="accent1"/>
+          </a:effectRef>
+          <a:fontRef idx="minor">
+            <a:schemeClr val="lt1"/>
+          </a:fontRef>
+        </p:style>
+        <p:txBody>
+          <a:bodyPr rtlCol="0" anchor="ctr"/>
+          <a:lstStyle/>
+          <a:p>
+            <a:pPr algn="ctr"/>
+            <a:endParaRPr lang="en-US"/>
+          </a:p>
+        </p:txBody>
+      </p:sp>
     </p:spTree>
     <p:extLst>
       <p:ext uri="{BB962C8B-B14F-4D97-AF65-F5344CB8AC3E}">
         <p14:creationId xmlns:p14="http://schemas.microsoft.com/office/powerpoint/2010/main" val="4012745426"/>
+      </p:ext>
+    </p:extLst>
+  </p:cSld>
+  <p:clrMapOvr>
+    <a:masterClrMapping/>
+  </p:clrMapOvr>
+  <p:timing>
+    <p:tnLst>
+      <p:par>
+        <p:cTn id="1" dur="indefinite" restart="never" nodeType="tmRoot">
+          <p:childTnLst>
+            <p:seq concurrent="1" nextAc="seek">
+              <p:cTn id="2" dur="indefinite" nodeType="mainSeq">
+                <p:childTnLst>
+                  <p:par>
+                    <p:cTn id="3" fill="hold">
+                      <p:stCondLst>
+                        <p:cond delay="indefinite"/>
+                      </p:stCondLst>
+                      <p:childTnLst>
+                        <p:par>
+                          <p:cTn id="4" fill="hold">
+                            <p:stCondLst>
+                              <p:cond delay="0"/>
+                            </p:stCondLst>
+                            <p:childTnLst>
+                              <p:par>
+                                <p:cTn id="5" presetID="1" presetClass="entr" presetSubtype="0" fill="hold" grpId="0" nodeType="clickEffect">
+                                  <p:stCondLst>
+                                    <p:cond delay="0"/>
+                                  </p:stCondLst>
+                                  <p:childTnLst>
+                                    <p:set>
+                                      <p:cBhvr>
+                                        <p:cTn id="6" dur="1" fill="hold">
+                                          <p:stCondLst>
+                                            <p:cond delay="0"/>
+                                          </p:stCondLst>
+                                        </p:cTn>
+                                        <p:tgtEl>
+                                          <p:spTgt spid="44"/>
+                                        </p:tgtEl>
+                                        <p:attrNameLst>
+                                          <p:attrName>style.visibility</p:attrName>
+                                        </p:attrNameLst>
+                                      </p:cBhvr>
+                                      <p:to>
+                                        <p:strVal val="visible"/>
+                                      </p:to>
+                                    </p:set>
+                                  </p:childTnLst>
+                                </p:cTn>
+                              </p:par>
+                            </p:childTnLst>
+                          </p:cTn>
+                        </p:par>
+                      </p:childTnLst>
+                    </p:cTn>
+                  </p:par>
+                </p:childTnLst>
+              </p:cTn>
+              <p:prevCondLst>
+                <p:cond evt="onPrev" delay="0">
+                  <p:tgtEl>
+                    <p:sldTgt/>
+                  </p:tgtEl>
+                </p:cond>
+              </p:prevCondLst>
+              <p:nextCondLst>
+                <p:cond evt="onNext" delay="0">
+                  <p:tgtEl>
+                    <p:sldTgt/>
+                  </p:tgtEl>
+                </p:cond>
+              </p:nextCondLst>
+            </p:seq>
+          </p:childTnLst>
+        </p:cTn>
+      </p:par>
+    </p:tnLst>
+    <p:bldLst>
+      <p:bldP spid="44" grpId="0" animBg="1"/>
+    </p:bldLst>
+  </p:timing>
+</p:sld>
+</file>
+
+<file path=ppt/slides/slide5.xml><?xml version="1.0" encoding="utf-8"?>
+<p:sld xmlns:a="http://schemas.openxmlformats.org/drawingml/2006/main" xmlns:r="http://schemas.openxmlformats.org/officeDocument/2006/relationships" xmlns:p="http://schemas.openxmlformats.org/presentationml/2006/main">
+  <p:cSld>
+    <p:spTree>
+      <p:nvGrpSpPr>
+        <p:cNvPr id="1" name=""/>
+        <p:cNvGrpSpPr/>
+        <p:nvPr/>
+      </p:nvGrpSpPr>
+      <p:grpSpPr>
+        <a:xfrm>
+          <a:off x="0" y="0"/>
+          <a:ext cx="0" cy="0"/>
+          <a:chOff x="0" y="0"/>
+          <a:chExt cx="0" cy="0"/>
+        </a:xfrm>
+      </p:grpSpPr>
+      <p:sp>
+        <p:nvSpPr>
+          <p:cNvPr id="2" name="Title 1">
+            <a:extLst>
+              <a:ext uri="{FF2B5EF4-FFF2-40B4-BE49-F238E27FC236}">
+                <a16:creationId xmlns:a16="http://schemas.microsoft.com/office/drawing/2014/main" id="{F416E67C-5737-DA4A-972E-0BC0A218EFF7}"/>
+              </a:ext>
+            </a:extLst>
+          </p:cNvPr>
+          <p:cNvSpPr>
+            <a:spLocks noGrp="1"/>
+          </p:cNvSpPr>
+          <p:nvPr>
+            <p:ph type="title"/>
+          </p:nvPr>
+        </p:nvSpPr>
+        <p:spPr/>
+        <p:txBody>
+          <a:bodyPr/>
+          <a:lstStyle/>
+          <a:p>
+            <a:r>
+              <a:rPr lang="en-US" dirty="0"/>
+              <a:t>Spatial convergence at 20 degrees</a:t>
+            </a:r>
+          </a:p>
+        </p:txBody>
+      </p:sp>
+      <p:sp>
+        <p:nvSpPr>
+          <p:cNvPr id="3" name="Content Placeholder 2">
+            <a:extLst>
+              <a:ext uri="{FF2B5EF4-FFF2-40B4-BE49-F238E27FC236}">
+                <a16:creationId xmlns:a16="http://schemas.microsoft.com/office/drawing/2014/main" id="{064FEDD7-7E9F-689A-E6E3-3D8CACEEFA46}"/>
+              </a:ext>
+            </a:extLst>
+          </p:cNvPr>
+          <p:cNvSpPr>
+            <a:spLocks noGrp="1"/>
+          </p:cNvSpPr>
+          <p:nvPr>
+            <p:ph idx="1"/>
+          </p:nvPr>
+        </p:nvSpPr>
+        <p:spPr>
+          <a:xfrm>
+            <a:off x="695326" y="1627200"/>
+            <a:ext cx="4859624" cy="4895850"/>
+          </a:xfrm>
+        </p:spPr>
+        <p:txBody>
+          <a:bodyPr/>
+          <a:lstStyle/>
+          <a:p>
+            <a:r>
+              <a:rPr lang="en-US" dirty="0"/>
+              <a:t>Agreement between different codes and different Mesh families is quite good for the high-lift solution</a:t>
+            </a:r>
+          </a:p>
+          <a:p>
+            <a:endParaRPr lang="en-US" dirty="0"/>
+          </a:p>
+        </p:txBody>
+      </p:sp>
+      <p:sp>
+        <p:nvSpPr>
+          <p:cNvPr id="4" name="Slide Number Placeholder 3">
+            <a:extLst>
+              <a:ext uri="{FF2B5EF4-FFF2-40B4-BE49-F238E27FC236}">
+                <a16:creationId xmlns:a16="http://schemas.microsoft.com/office/drawing/2014/main" id="{C39C324B-7B8D-6546-ACDE-DC8D9DA92FCA}"/>
+              </a:ext>
+            </a:extLst>
+          </p:cNvPr>
+          <p:cNvSpPr>
+            <a:spLocks noGrp="1"/>
+          </p:cNvSpPr>
+          <p:nvPr>
+            <p:ph type="sldNum" sz="quarter" idx="10"/>
+          </p:nvPr>
+        </p:nvSpPr>
+        <p:spPr/>
+        <p:txBody>
+          <a:bodyPr/>
+          <a:lstStyle/>
+          <a:p>
+            <a:fld id="{30ADABB7-F9A6-4A4D-9415-296AC5E687F8}" type="slidenum">
+              <a:rPr lang="de-DE" smtClean="0"/>
+              <a:pPr/>
+              <a:t>5</a:t>
+            </a:fld>
+            <a:endParaRPr lang="de-DE"/>
+          </a:p>
+        </p:txBody>
+      </p:sp>
+      <p:sp>
+        <p:nvSpPr>
+          <p:cNvPr id="5" name="Footer Placeholder 4">
+            <a:extLst>
+              <a:ext uri="{FF2B5EF4-FFF2-40B4-BE49-F238E27FC236}">
+                <a16:creationId xmlns:a16="http://schemas.microsoft.com/office/drawing/2014/main" id="{1FF0599F-A936-C267-D90F-DD2316DE0375}"/>
+              </a:ext>
+            </a:extLst>
+          </p:cNvPr>
+          <p:cNvSpPr>
+            <a:spLocks noGrp="1"/>
+          </p:cNvSpPr>
+          <p:nvPr>
+            <p:ph type="ftr" sz="quarter" idx="11"/>
+          </p:nvPr>
+        </p:nvSpPr>
+        <p:spPr/>
+        <p:txBody>
+          <a:bodyPr/>
+          <a:lstStyle/>
+          <a:p>
+            <a:r>
+              <a:rPr lang="en-US"/>
+              <a:t>Name of lecturer, institute, date</a:t>
+            </a:r>
+            <a:endParaRPr lang="de-DE" dirty="0"/>
+          </a:p>
+        </p:txBody>
+      </p:sp>
+      <p:pic>
+        <p:nvPicPr>
+          <p:cNvPr id="16" name="Picture 15">
+            <a:extLst>
+              <a:ext uri="{FF2B5EF4-FFF2-40B4-BE49-F238E27FC236}">
+                <a16:creationId xmlns:a16="http://schemas.microsoft.com/office/drawing/2014/main" id="{9EFBFADB-01A5-2263-AA4E-0E19EE52F890}"/>
+              </a:ext>
+            </a:extLst>
+          </p:cNvPr>
+          <p:cNvPicPr>
+            <a:picLocks noChangeAspect="1"/>
+          </p:cNvPicPr>
+          <p:nvPr/>
+        </p:nvPicPr>
+        <p:blipFill>
+          <a:blip r:embed="rId2">
+            <a:extLst>
+              <a:ext uri="{28A0092B-C50C-407E-A947-70E740481C1C}">
+                <a14:useLocalDpi xmlns:a14="http://schemas.microsoft.com/office/drawing/2010/main" val="0"/>
+              </a:ext>
+            </a:extLst>
+          </a:blip>
+          <a:stretch>
+            <a:fillRect/>
+          </a:stretch>
+        </p:blipFill>
+        <p:spPr>
+          <a:xfrm>
+            <a:off x="5855566" y="1242399"/>
+            <a:ext cx="5940194" cy="5280651"/>
+          </a:xfrm>
+          <a:prstGeom prst="rect">
+            <a:avLst/>
+          </a:prstGeom>
+        </p:spPr>
+      </p:pic>
+    </p:spTree>
+    <p:extLst>
+      <p:ext uri="{BB962C8B-B14F-4D97-AF65-F5344CB8AC3E}">
+        <p14:creationId xmlns:p14="http://schemas.microsoft.com/office/powerpoint/2010/main" val="3376406342"/>
       </p:ext>
     </p:extLst>
   </p:cSld>
@@ -30866,7 +30952,7 @@
           <p:cNvPr id="2" name="Title 1">
             <a:extLst>
               <a:ext uri="{FF2B5EF4-FFF2-40B4-BE49-F238E27FC236}">
-                <a16:creationId xmlns:a16="http://schemas.microsoft.com/office/drawing/2014/main" id="{5A08B93C-779D-BAFE-9C2F-FB2335C48E6C}"/>
+                <a16:creationId xmlns:a16="http://schemas.microsoft.com/office/drawing/2014/main" id="{F416E67C-5737-DA4A-972E-0BC0A218EFF7}"/>
               </a:ext>
             </a:extLst>
           </p:cNvPr>
@@ -30884,7 +30970,7 @@
           <a:p>
             <a:r>
               <a:rPr lang="en-US" dirty="0"/>
-              <a:t>Main Take-aways</a:t>
+              <a:t>Spatial convergence at 20 degrees</a:t>
             </a:r>
           </a:p>
         </p:txBody>
@@ -30894,7 +30980,7 @@
           <p:cNvPr id="3" name="Content Placeholder 2">
             <a:extLst>
               <a:ext uri="{FF2B5EF4-FFF2-40B4-BE49-F238E27FC236}">
-                <a16:creationId xmlns:a16="http://schemas.microsoft.com/office/drawing/2014/main" id="{184FA6A7-31D8-B59F-3C30-55ADBBE2E030}"/>
+                <a16:creationId xmlns:a16="http://schemas.microsoft.com/office/drawing/2014/main" id="{064FEDD7-7E9F-689A-E6E3-3D8CACEEFA46}"/>
               </a:ext>
             </a:extLst>
           </p:cNvPr>
@@ -30905,73 +30991,37 @@
             <p:ph idx="1"/>
           </p:nvPr>
         </p:nvSpPr>
-        <p:spPr/>
+        <p:spPr>
+          <a:xfrm>
+            <a:off x="695326" y="1627200"/>
+            <a:ext cx="4859624" cy="2830500"/>
+          </a:xfrm>
+        </p:spPr>
         <p:txBody>
           <a:bodyPr/>
           <a:lstStyle/>
           <a:p>
-            <a:pPr marR="0">
-              <a:spcAft>
-                <a:spcPts val="0"/>
-              </a:spcAft>
-            </a:pPr>
-            <a:r>
-              <a:rPr lang="en-US" b="1" dirty="0"/>
-              <a:t>The multiple solutions obtained for the TC-1 configuration are consistent between different solvers over different grid families and from examining their grid convergence behavior none of the solutions can be identified as the “correct” solution.</a:t>
-            </a:r>
-          </a:p>
-          <a:p>
-            <a:pPr marR="0">
-              <a:spcAft>
-                <a:spcPts val="0"/>
-              </a:spcAft>
-            </a:pPr>
             <a:r>
               <a:rPr lang="en-US" dirty="0"/>
-              <a:t>Switching between solution branches happens randomly and participants report different sensitivities</a:t>
-            </a:r>
-          </a:p>
-          <a:p>
-            <a:pPr lvl="1"/>
+              <a:t>Spatial convergence looks indistinguishable from the high-lift solution</a:t>
+            </a:r>
+          </a:p>
+          <a:p>
             <a:r>
               <a:rPr lang="en-US" dirty="0"/>
-              <a:t>Numerical dissipation</a:t>
-            </a:r>
-          </a:p>
-          <a:p>
-            <a:pPr lvl="1"/>
+              <a:t>The low-lift solution can be found by 5 different spatial </a:t>
+            </a:r>
+            <a:r>
+              <a:rPr lang="en-US" dirty="0" err="1"/>
+              <a:t>discretizations</a:t>
+            </a:r>
             <a:r>
               <a:rPr lang="en-US" dirty="0"/>
-              <a:t>Turbulence model</a:t>
-            </a:r>
-          </a:p>
-          <a:p>
-            <a:pPr lvl="1"/>
-            <a:r>
-              <a:rPr lang="en-US" dirty="0"/>
-              <a:t>Geometric variation</a:t>
-            </a:r>
-          </a:p>
-          <a:p>
-            <a:pPr lvl="1"/>
-            <a:r>
-              <a:rPr lang="en-US" dirty="0"/>
-              <a:t>Mesh variation</a:t>
-            </a:r>
-          </a:p>
-          <a:p>
-            <a:r>
-              <a:rPr lang="en-US" dirty="0"/>
-              <a:t>Multiple solutions can be found through a combination of these perturbations of the solver and alpha-continuation</a:t>
-            </a:r>
-          </a:p>
-          <a:p>
-            <a:pPr marL="0" indent="0">
-              <a:buNone/>
-            </a:pPr>
-            <a:endParaRPr lang="en-US" dirty="0">
-              <a:latin typeface="+mj-lt"/>
-            </a:endParaRPr>
+              <a:t> on 4 different mesh families</a:t>
+            </a:r>
+          </a:p>
+          <a:p>
+            <a:endParaRPr lang="en-US" dirty="0"/>
           </a:p>
         </p:txBody>
       </p:sp>
@@ -30980,7 +31030,7 @@
           <p:cNvPr id="4" name="Slide Number Placeholder 3">
             <a:extLst>
               <a:ext uri="{FF2B5EF4-FFF2-40B4-BE49-F238E27FC236}">
-                <a16:creationId xmlns:a16="http://schemas.microsoft.com/office/drawing/2014/main" id="{65B35564-C49D-962D-1103-DDEB61C985BA}"/>
+                <a16:creationId xmlns:a16="http://schemas.microsoft.com/office/drawing/2014/main" id="{C39C324B-7B8D-6546-ACDE-DC8D9DA92FCA}"/>
               </a:ext>
             </a:extLst>
           </p:cNvPr>
@@ -31010,7 +31060,7 @@
           <p:cNvPr id="5" name="Footer Placeholder 4">
             <a:extLst>
               <a:ext uri="{FF2B5EF4-FFF2-40B4-BE49-F238E27FC236}">
-                <a16:creationId xmlns:a16="http://schemas.microsoft.com/office/drawing/2014/main" id="{980D154B-87CD-1C13-9743-8FF2B116DDF9}"/>
+                <a16:creationId xmlns:a16="http://schemas.microsoft.com/office/drawing/2014/main" id="{1FF0599F-A936-C267-D90F-DD2316DE0375}"/>
               </a:ext>
             </a:extLst>
           </p:cNvPr>
@@ -31034,10 +31084,45 @@
           </a:p>
         </p:txBody>
       </p:sp>
+      <p:pic>
+        <p:nvPicPr>
+          <p:cNvPr id="16" name="Picture 15">
+            <a:extLst>
+              <a:ext uri="{FF2B5EF4-FFF2-40B4-BE49-F238E27FC236}">
+                <a16:creationId xmlns:a16="http://schemas.microsoft.com/office/drawing/2014/main" id="{9EFBFADB-01A5-2263-AA4E-0E19EE52F890}"/>
+              </a:ext>
+            </a:extLst>
+          </p:cNvPr>
+          <p:cNvPicPr>
+            <a:picLocks noChangeAspect="1"/>
+          </p:cNvPicPr>
+          <p:nvPr/>
+        </p:nvPicPr>
+        <p:blipFill>
+          <a:blip r:embed="rId2">
+            <a:extLst>
+              <a:ext uri="{28A0092B-C50C-407E-A947-70E740481C1C}">
+                <a14:useLocalDpi xmlns:a14="http://schemas.microsoft.com/office/drawing/2010/main" val="0"/>
+              </a:ext>
+            </a:extLst>
+          </a:blip>
+          <a:srcRect/>
+          <a:stretch/>
+        </p:blipFill>
+        <p:spPr>
+          <a:xfrm>
+            <a:off x="5855566" y="1242399"/>
+            <a:ext cx="5940193" cy="5280651"/>
+          </a:xfrm>
+          <a:prstGeom prst="rect">
+            <a:avLst/>
+          </a:prstGeom>
+        </p:spPr>
+      </p:pic>
     </p:spTree>
     <p:extLst>
       <p:ext uri="{BB962C8B-B14F-4D97-AF65-F5344CB8AC3E}">
-        <p14:creationId xmlns:p14="http://schemas.microsoft.com/office/powerpoint/2010/main" val="1533210277"/>
+        <p14:creationId xmlns:p14="http://schemas.microsoft.com/office/powerpoint/2010/main" val="1483311000"/>
       </p:ext>
     </p:extLst>
   </p:cSld>
@@ -31069,6 +31154,209 @@
           <p:cNvPr id="2" name="Title 1">
             <a:extLst>
               <a:ext uri="{FF2B5EF4-FFF2-40B4-BE49-F238E27FC236}">
+                <a16:creationId xmlns:a16="http://schemas.microsoft.com/office/drawing/2014/main" id="{5A08B93C-779D-BAFE-9C2F-FB2335C48E6C}"/>
+              </a:ext>
+            </a:extLst>
+          </p:cNvPr>
+          <p:cNvSpPr>
+            <a:spLocks noGrp="1"/>
+          </p:cNvSpPr>
+          <p:nvPr>
+            <p:ph type="title"/>
+          </p:nvPr>
+        </p:nvSpPr>
+        <p:spPr/>
+        <p:txBody>
+          <a:bodyPr/>
+          <a:lstStyle/>
+          <a:p>
+            <a:r>
+              <a:rPr lang="en-US" dirty="0"/>
+              <a:t>Main Take-aways</a:t>
+            </a:r>
+          </a:p>
+        </p:txBody>
+      </p:sp>
+      <p:sp>
+        <p:nvSpPr>
+          <p:cNvPr id="3" name="Content Placeholder 2">
+            <a:extLst>
+              <a:ext uri="{FF2B5EF4-FFF2-40B4-BE49-F238E27FC236}">
+                <a16:creationId xmlns:a16="http://schemas.microsoft.com/office/drawing/2014/main" id="{184FA6A7-31D8-B59F-3C30-55ADBBE2E030}"/>
+              </a:ext>
+            </a:extLst>
+          </p:cNvPr>
+          <p:cNvSpPr>
+            <a:spLocks noGrp="1"/>
+          </p:cNvSpPr>
+          <p:nvPr>
+            <p:ph idx="1"/>
+          </p:nvPr>
+        </p:nvSpPr>
+        <p:spPr/>
+        <p:txBody>
+          <a:bodyPr/>
+          <a:lstStyle/>
+          <a:p>
+            <a:pPr marR="0">
+              <a:spcAft>
+                <a:spcPts val="0"/>
+              </a:spcAft>
+            </a:pPr>
+            <a:r>
+              <a:rPr lang="en-US" b="1" dirty="0"/>
+              <a:t>The multiple solutions obtained for the TC-1 configuration are consistent between different solvers over different grid families and from examining their grid convergence behavior none of the solutions can be identified as the “correct” solution.</a:t>
+            </a:r>
+          </a:p>
+          <a:p>
+            <a:pPr marR="0">
+              <a:spcAft>
+                <a:spcPts val="0"/>
+              </a:spcAft>
+            </a:pPr>
+            <a:r>
+              <a:rPr lang="en-US" dirty="0"/>
+              <a:t>Switching between solution branches happens randomly and participants report different sensitivities</a:t>
+            </a:r>
+          </a:p>
+          <a:p>
+            <a:pPr lvl="1"/>
+            <a:r>
+              <a:rPr lang="en-US" dirty="0"/>
+              <a:t>Numerical dissipation</a:t>
+            </a:r>
+          </a:p>
+          <a:p>
+            <a:pPr lvl="1"/>
+            <a:r>
+              <a:rPr lang="en-US" dirty="0"/>
+              <a:t>Turbulence model</a:t>
+            </a:r>
+          </a:p>
+          <a:p>
+            <a:pPr lvl="1"/>
+            <a:r>
+              <a:rPr lang="en-US" dirty="0"/>
+              <a:t>Geometric variation</a:t>
+            </a:r>
+          </a:p>
+          <a:p>
+            <a:pPr lvl="1"/>
+            <a:r>
+              <a:rPr lang="en-US" dirty="0"/>
+              <a:t>Mesh variation</a:t>
+            </a:r>
+          </a:p>
+          <a:p>
+            <a:r>
+              <a:rPr lang="en-US" dirty="0"/>
+              <a:t>Multiple solutions can be found through a combination of these perturbations of the solver and alpha-continuation</a:t>
+            </a:r>
+          </a:p>
+          <a:p>
+            <a:pPr marL="0" indent="0">
+              <a:buNone/>
+            </a:pPr>
+            <a:endParaRPr lang="en-US" dirty="0">
+              <a:latin typeface="+mj-lt"/>
+            </a:endParaRPr>
+          </a:p>
+        </p:txBody>
+      </p:sp>
+      <p:sp>
+        <p:nvSpPr>
+          <p:cNvPr id="4" name="Slide Number Placeholder 3">
+            <a:extLst>
+              <a:ext uri="{FF2B5EF4-FFF2-40B4-BE49-F238E27FC236}">
+                <a16:creationId xmlns:a16="http://schemas.microsoft.com/office/drawing/2014/main" id="{65B35564-C49D-962D-1103-DDEB61C985BA}"/>
+              </a:ext>
+            </a:extLst>
+          </p:cNvPr>
+          <p:cNvSpPr>
+            <a:spLocks noGrp="1"/>
+          </p:cNvSpPr>
+          <p:nvPr>
+            <p:ph type="sldNum" sz="quarter" idx="10"/>
+          </p:nvPr>
+        </p:nvSpPr>
+        <p:spPr/>
+        <p:txBody>
+          <a:bodyPr/>
+          <a:lstStyle/>
+          <a:p>
+            <a:fld id="{30ADABB7-F9A6-4A4D-9415-296AC5E687F8}" type="slidenum">
+              <a:rPr lang="de-DE" smtClean="0"/>
+              <a:pPr/>
+              <a:t>7</a:t>
+            </a:fld>
+            <a:endParaRPr lang="de-DE"/>
+          </a:p>
+        </p:txBody>
+      </p:sp>
+      <p:sp>
+        <p:nvSpPr>
+          <p:cNvPr id="5" name="Footer Placeholder 4">
+            <a:extLst>
+              <a:ext uri="{FF2B5EF4-FFF2-40B4-BE49-F238E27FC236}">
+                <a16:creationId xmlns:a16="http://schemas.microsoft.com/office/drawing/2014/main" id="{980D154B-87CD-1C13-9743-8FF2B116DDF9}"/>
+              </a:ext>
+            </a:extLst>
+          </p:cNvPr>
+          <p:cNvSpPr>
+            <a:spLocks noGrp="1"/>
+          </p:cNvSpPr>
+          <p:nvPr>
+            <p:ph type="ftr" sz="quarter" idx="11"/>
+          </p:nvPr>
+        </p:nvSpPr>
+        <p:spPr/>
+        <p:txBody>
+          <a:bodyPr/>
+          <a:lstStyle/>
+          <a:p>
+            <a:r>
+              <a:rPr lang="en-US"/>
+              <a:t>Name of lecturer, institute, date</a:t>
+            </a:r>
+            <a:endParaRPr lang="de-DE" dirty="0"/>
+          </a:p>
+        </p:txBody>
+      </p:sp>
+    </p:spTree>
+    <p:extLst>
+      <p:ext uri="{BB962C8B-B14F-4D97-AF65-F5344CB8AC3E}">
+        <p14:creationId xmlns:p14="http://schemas.microsoft.com/office/powerpoint/2010/main" val="1533210277"/>
+      </p:ext>
+    </p:extLst>
+  </p:cSld>
+  <p:clrMapOvr>
+    <a:masterClrMapping/>
+  </p:clrMapOvr>
+</p:sld>
+</file>
+
+<file path=ppt/slides/slide8.xml><?xml version="1.0" encoding="utf-8"?>
+<p:sld xmlns:a="http://schemas.openxmlformats.org/drawingml/2006/main" xmlns:r="http://schemas.openxmlformats.org/officeDocument/2006/relationships" xmlns:p="http://schemas.openxmlformats.org/presentationml/2006/main">
+  <p:cSld>
+    <p:spTree>
+      <p:nvGrpSpPr>
+        <p:cNvPr id="1" name=""/>
+        <p:cNvGrpSpPr/>
+        <p:nvPr/>
+      </p:nvGrpSpPr>
+      <p:grpSpPr>
+        <a:xfrm>
+          <a:off x="0" y="0"/>
+          <a:ext cx="0" cy="0"/>
+          <a:chOff x="0" y="0"/>
+          <a:chExt cx="0" cy="0"/>
+        </a:xfrm>
+      </p:grpSpPr>
+      <p:sp>
+        <p:nvSpPr>
+          <p:cNvPr id="2" name="Title 1">
+            <a:extLst>
+              <a:ext uri="{FF2B5EF4-FFF2-40B4-BE49-F238E27FC236}">
                 <a16:creationId xmlns:a16="http://schemas.microsoft.com/office/drawing/2014/main" id="{A0EC630F-32B8-6C5E-2251-0A881C8B90CF}"/>
               </a:ext>
             </a:extLst>
@@ -31169,7 +31457,7 @@
             <a:fld id="{30ADABB7-F9A6-4A4D-9415-296AC5E687F8}" type="slidenum">
               <a:rPr lang="de-DE" smtClean="0"/>
               <a:pPr/>
-              <a:t>7</a:t>
+              <a:t>8</a:t>
             </a:fld>
             <a:endParaRPr lang="de-DE"/>
           </a:p>

--- a/Vision.pptx
+++ b/Vision.pptx
@@ -233,7 +233,7 @@
           <a:p>
             <a:fld id="{CE0980D6-5DF0-463D-BFB7-BC7EA5530348}" type="datetimeFigureOut">
               <a:rPr lang="de-DE" smtClean="0"/>
-              <a:t>22.05.2026</a:t>
+              <a:t>04.06.2026</a:t>
             </a:fld>
             <a:endParaRPr lang="de-DE"/>
           </a:p>
@@ -410,7 +410,7 @@
           <a:p>
             <a:fld id="{2E535C94-B646-4D4D-A5E3-882C7E78FF5D}" type="datetimeFigureOut">
               <a:rPr lang="de-DE" smtClean="0"/>
-              <a:t>22.05.2026</a:t>
+              <a:t>03.06.2026</a:t>
             </a:fld>
             <a:endParaRPr lang="de-DE"/>
           </a:p>
@@ -1031,13 +1031,49 @@
           <a:lstStyle/>
           <a:p>
             <a:r>
-              <a:rPr lang="en-US"/>
-              <a:t>Name of lecturer, institute, date</a:t>
+              <a:rPr lang="de-DE"/>
+              <a:t>Malte Wegener, HLPW6 Mini-Workshop, 11.06.2026</a:t>
             </a:r>
             <a:endParaRPr lang="de-DE" dirty="0"/>
           </a:p>
         </p:txBody>
       </p:sp>
+      <p:pic>
+        <p:nvPicPr>
+          <p:cNvPr id="8" name="Graphic 7">
+            <a:extLst>
+              <a:ext uri="{FF2B5EF4-FFF2-40B4-BE49-F238E27FC236}">
+                <a16:creationId xmlns:a16="http://schemas.microsoft.com/office/drawing/2014/main" id="{D7D5B157-9EA0-6CC0-1566-F78C42E3B8E6}"/>
+              </a:ext>
+            </a:extLst>
+          </p:cNvPr>
+          <p:cNvPicPr>
+            <a:picLocks noChangeAspect="1"/>
+          </p:cNvPicPr>
+          <p:nvPr userDrawn="1"/>
+        </p:nvPicPr>
+        <p:blipFill>
+          <a:blip r:embed="rId4">
+            <a:extLst>
+              <a:ext uri="{96DAC541-7B7A-43D3-8B79-37D633B846F1}">
+                <asvg:svgBlip xmlns:asvg="http://schemas.microsoft.com/office/drawing/2016/SVG/main" r:embed="rId5"/>
+              </a:ext>
+            </a:extLst>
+          </a:blip>
+          <a:stretch>
+            <a:fillRect/>
+          </a:stretch>
+        </p:blipFill>
+        <p:spPr>
+          <a:xfrm>
+            <a:off x="8705532" y="5268397"/>
+            <a:ext cx="1687459" cy="1411329"/>
+          </a:xfrm>
+          <a:prstGeom prst="rect">
+            <a:avLst/>
+          </a:prstGeom>
+        </p:spPr>
+      </p:pic>
     </p:spTree>
     <p:extLst>
       <p:ext uri="{BB962C8B-B14F-4D97-AF65-F5344CB8AC3E}">
@@ -3137,8 +3173,8 @@
           </a:lstStyle>
           <a:p>
             <a:r>
-              <a:rPr lang="en-US"/>
-              <a:t>Name of lecturer, institute, date</a:t>
+              <a:rPr lang="de-DE"/>
+              <a:t>Malte Wegener, HLPW6 Mini-Workshop, 11.06.2026</a:t>
             </a:r>
             <a:endParaRPr lang="de-DE" dirty="0"/>
           </a:p>
@@ -3339,9 +3375,10 @@
           </a:lstStyle>
           <a:p>
             <a:r>
-              <a:rPr lang="de-DE" dirty="0"/>
-              <a:t>Name des Vortragenden, Institut, Datum</a:t>
-            </a:r>
+              <a:rPr lang="de-DE"/>
+              <a:t>Malte Wegener, HLPW6 Mini-Workshop, 11.06.2026</a:t>
+            </a:r>
+            <a:endParaRPr lang="de-DE" dirty="0"/>
           </a:p>
         </p:txBody>
       </p:sp>
@@ -5475,8 +5512,8 @@
           <a:lstStyle/>
           <a:p>
             <a:r>
-              <a:rPr lang="en-US" dirty="0"/>
-              <a:t>Name of lecturer, institute, date</a:t>
+              <a:rPr lang="de-DE"/>
+              <a:t>Malte Wegener, HLPW6 Mini-Workshop, 11.06.2026</a:t>
             </a:r>
             <a:endParaRPr lang="de-DE" dirty="0"/>
           </a:p>
@@ -5824,8 +5861,8 @@
           <a:lstStyle/>
           <a:p>
             <a:r>
-              <a:rPr lang="en-US"/>
-              <a:t>Name of lecturer, institute, date</a:t>
+              <a:rPr lang="de-DE"/>
+              <a:t>Malte Wegener, HLPW6 Mini-Workshop, 11.06.2026</a:t>
             </a:r>
             <a:endParaRPr lang="de-DE" dirty="0"/>
           </a:p>
@@ -6163,8 +6200,8 @@
           <a:lstStyle/>
           <a:p>
             <a:r>
-              <a:rPr lang="en-US"/>
-              <a:t>Name of lecturer, institute, date</a:t>
+              <a:rPr lang="de-DE"/>
+              <a:t>Malte Wegener, HLPW6 Mini-Workshop, 11.06.2026</a:t>
             </a:r>
             <a:endParaRPr lang="de-DE" dirty="0"/>
           </a:p>
@@ -6559,8 +6596,8 @@
           <a:lstStyle/>
           <a:p>
             <a:r>
-              <a:rPr lang="en-US"/>
-              <a:t>Name of lecturer, institute, date</a:t>
+              <a:rPr lang="de-DE"/>
+              <a:t>Malte Wegener, HLPW6 Mini-Workshop, 11.06.2026</a:t>
             </a:r>
             <a:endParaRPr lang="de-DE" dirty="0"/>
           </a:p>
@@ -6961,8 +6998,8 @@
           <a:lstStyle/>
           <a:p>
             <a:r>
-              <a:rPr lang="en-US"/>
-              <a:t>Name of lecturer, institute, date</a:t>
+              <a:rPr lang="de-DE"/>
+              <a:t>Malte Wegener, HLPW6 Mini-Workshop, 11.06.2026</a:t>
             </a:r>
             <a:endParaRPr lang="de-DE" dirty="0"/>
           </a:p>
@@ -7593,8 +7630,8 @@
           <a:lstStyle/>
           <a:p>
             <a:r>
-              <a:rPr lang="en-US"/>
-              <a:t>Name of lecturer, institute, date</a:t>
+              <a:rPr lang="de-DE"/>
+              <a:t>Malte Wegener, HLPW6 Mini-Workshop, 11.06.2026</a:t>
             </a:r>
             <a:endParaRPr lang="de-DE" dirty="0"/>
           </a:p>
@@ -8126,8 +8163,8 @@
           <a:lstStyle/>
           <a:p>
             <a:r>
-              <a:rPr lang="en-US"/>
-              <a:t>Name of lecturer, institute, date</a:t>
+              <a:rPr lang="de-DE"/>
+              <a:t>Malte Wegener, HLPW6 Mini-Workshop, 11.06.2026</a:t>
             </a:r>
             <a:endParaRPr lang="de-DE" dirty="0"/>
           </a:p>
@@ -9116,8 +9153,8 @@
           <a:lstStyle/>
           <a:p>
             <a:r>
-              <a:rPr lang="en-US"/>
-              <a:t>Name of lecturer, institute, date</a:t>
+              <a:rPr lang="de-DE"/>
+              <a:t>Malte Wegener, HLPW6 Mini-Workshop, 11.06.2026</a:t>
             </a:r>
             <a:endParaRPr lang="de-DE" dirty="0"/>
           </a:p>
@@ -9615,8 +9652,8 @@
           <a:lstStyle/>
           <a:p>
             <a:r>
-              <a:rPr lang="en-US"/>
-              <a:t>Name of lecturer, institute, date</a:t>
+              <a:rPr lang="de-DE"/>
+              <a:t>Malte Wegener, HLPW6 Mini-Workshop, 11.06.2026</a:t>
             </a:r>
             <a:endParaRPr lang="de-DE" dirty="0"/>
           </a:p>
@@ -9905,8 +9942,8 @@
           <a:lstStyle/>
           <a:p>
             <a:r>
-              <a:rPr lang="en-US"/>
-              <a:t>Name of lecturer, institute, date</a:t>
+              <a:rPr lang="de-DE"/>
+              <a:t>Malte Wegener, HLPW6 Mini-Workshop, 11.06.2026</a:t>
             </a:r>
             <a:endParaRPr lang="de-DE" dirty="0"/>
           </a:p>
@@ -10431,8 +10468,8 @@
           </a:lstStyle>
           <a:p>
             <a:r>
-              <a:rPr lang="en-US"/>
-              <a:t>Name of lecturer, institute, date</a:t>
+              <a:rPr lang="de-DE"/>
+              <a:t>Malte Wegener, HLPW6 Mini-Workshop, 11.06.2026</a:t>
             </a:r>
             <a:endParaRPr lang="de-DE" dirty="0"/>
           </a:p>
@@ -12552,8 +12589,8 @@
           </a:lstStyle>
           <a:p>
             <a:r>
-              <a:rPr lang="en-US"/>
-              <a:t>Name of lecturer, institute, date</a:t>
+              <a:rPr lang="de-DE"/>
+              <a:t>Malte Wegener, HLPW6 Mini-Workshop, 11.06.2026</a:t>
             </a:r>
             <a:endParaRPr lang="de-DE" dirty="0"/>
           </a:p>
@@ -12789,9 +12826,10 @@
           <a:lstStyle/>
           <a:p>
             <a:r>
-              <a:rPr lang="de-DE" dirty="0"/>
-              <a:t>Name des Vortragenden, Institut, Datum</a:t>
-            </a:r>
+              <a:rPr lang="de-DE"/>
+              <a:t>Malte Wegener, HLPW6 Mini-Workshop, 11.06.2026</a:t>
+            </a:r>
+            <a:endParaRPr lang="de-DE" dirty="0"/>
           </a:p>
         </p:txBody>
       </p:sp>
@@ -13007,8 +13045,8 @@
           <a:lstStyle/>
           <a:p>
             <a:r>
-              <a:rPr lang="en-US"/>
-              <a:t>Name of lecturer, institute, date</a:t>
+              <a:rPr lang="de-DE"/>
+              <a:t>Malte Wegener, HLPW6 Mini-Workshop, 11.06.2026</a:t>
             </a:r>
             <a:endParaRPr lang="de-DE" dirty="0"/>
           </a:p>
@@ -15247,8 +15285,8 @@
           <a:lstStyle/>
           <a:p>
             <a:r>
-              <a:rPr lang="en-US"/>
-              <a:t>Name of lecturer, institute, date</a:t>
+              <a:rPr lang="de-DE"/>
+              <a:t>Malte Wegener, HLPW6 Mini-Workshop, 11.06.2026</a:t>
             </a:r>
             <a:endParaRPr lang="de-DE" dirty="0"/>
           </a:p>
@@ -15585,8 +15623,8 @@
           <a:lstStyle/>
           <a:p>
             <a:r>
-              <a:rPr lang="en-US"/>
-              <a:t>Name of lecturer, institute, date</a:t>
+              <a:rPr lang="de-DE"/>
+              <a:t>Malte Wegener, HLPW6 Mini-Workshop, 11.06.2026</a:t>
             </a:r>
             <a:endParaRPr lang="de-DE" dirty="0"/>
           </a:p>
@@ -15981,8 +16019,8 @@
           <a:lstStyle/>
           <a:p>
             <a:r>
-              <a:rPr lang="en-US"/>
-              <a:t>Name of lecturer, institute, date</a:t>
+              <a:rPr lang="de-DE"/>
+              <a:t>Malte Wegener, HLPW6 Mini-Workshop, 11.06.2026</a:t>
             </a:r>
             <a:endParaRPr lang="de-DE" dirty="0"/>
           </a:p>
@@ -16383,8 +16421,8 @@
           <a:lstStyle/>
           <a:p>
             <a:r>
-              <a:rPr lang="en-US"/>
-              <a:t>Name of lecturer, institute, date</a:t>
+              <a:rPr lang="de-DE"/>
+              <a:t>Malte Wegener, HLPW6 Mini-Workshop, 11.06.2026</a:t>
             </a:r>
             <a:endParaRPr lang="de-DE" dirty="0"/>
           </a:p>
@@ -17015,8 +17053,8 @@
           <a:lstStyle/>
           <a:p>
             <a:r>
-              <a:rPr lang="en-US"/>
-              <a:t>Name of lecturer, institute, date</a:t>
+              <a:rPr lang="de-DE"/>
+              <a:t>Malte Wegener, HLPW6 Mini-Workshop, 11.06.2026</a:t>
             </a:r>
             <a:endParaRPr lang="de-DE" dirty="0"/>
           </a:p>
@@ -17416,13 +17454,49 @@
           <a:lstStyle/>
           <a:p>
             <a:r>
-              <a:rPr lang="en-US"/>
-              <a:t>Name of lecturer, institute, date</a:t>
+              <a:rPr lang="de-DE"/>
+              <a:t>Malte Wegener, HLPW6 Mini-Workshop, 11.06.2026</a:t>
             </a:r>
             <a:endParaRPr lang="de-DE" dirty="0"/>
           </a:p>
         </p:txBody>
       </p:sp>
+      <p:pic>
+        <p:nvPicPr>
+          <p:cNvPr id="5" name="Graphic 4">
+            <a:extLst>
+              <a:ext uri="{FF2B5EF4-FFF2-40B4-BE49-F238E27FC236}">
+                <a16:creationId xmlns:a16="http://schemas.microsoft.com/office/drawing/2014/main" id="{C1E8E1E4-948A-3278-44FC-EE2E89283E9C}"/>
+              </a:ext>
+            </a:extLst>
+          </p:cNvPr>
+          <p:cNvPicPr>
+            <a:picLocks noChangeAspect="1"/>
+          </p:cNvPicPr>
+          <p:nvPr userDrawn="1"/>
+        </p:nvPicPr>
+        <p:blipFill>
+          <a:blip r:embed="rId3">
+            <a:extLst>
+              <a:ext uri="{96DAC541-7B7A-43D3-8B79-37D633B846F1}">
+                <asvg:svgBlip xmlns:asvg="http://schemas.microsoft.com/office/drawing/2016/SVG/main" r:embed="rId4"/>
+              </a:ext>
+            </a:extLst>
+          </a:blip>
+          <a:stretch>
+            <a:fillRect/>
+          </a:stretch>
+        </p:blipFill>
+        <p:spPr>
+          <a:xfrm>
+            <a:off x="10037942" y="296190"/>
+            <a:ext cx="943879" cy="789426"/>
+          </a:xfrm>
+          <a:prstGeom prst="rect">
+            <a:avLst/>
+          </a:prstGeom>
+        </p:spPr>
+      </p:pic>
     </p:spTree>
     <p:extLst>
       <p:ext uri="{BB962C8B-B14F-4D97-AF65-F5344CB8AC3E}">
@@ -17883,8 +17957,8 @@
           <a:lstStyle/>
           <a:p>
             <a:r>
-              <a:rPr lang="en-US"/>
-              <a:t>Name of lecturer, institute, date</a:t>
+              <a:rPr lang="de-DE"/>
+              <a:t>Malte Wegener, HLPW6 Mini-Workshop, 11.06.2026</a:t>
             </a:r>
             <a:endParaRPr lang="de-DE" dirty="0"/>
           </a:p>
@@ -18871,8 +18945,8 @@
           <a:lstStyle/>
           <a:p>
             <a:r>
-              <a:rPr lang="en-US"/>
-              <a:t>Name of lecturer, institute, date</a:t>
+              <a:rPr lang="de-DE"/>
+              <a:t>Malte Wegener, HLPW6 Mini-Workshop, 11.06.2026</a:t>
             </a:r>
             <a:endParaRPr lang="de-DE" dirty="0"/>
           </a:p>
@@ -19291,8 +19365,8 @@
           <a:lstStyle/>
           <a:p>
             <a:r>
-              <a:rPr lang="en-US"/>
-              <a:t>Name of lecturer, institute, date</a:t>
+              <a:rPr lang="de-DE"/>
+              <a:t>Malte Wegener, HLPW6 Mini-Workshop, 11.06.2026</a:t>
             </a:r>
             <a:endParaRPr lang="de-DE" dirty="0"/>
           </a:p>
@@ -19834,8 +19908,8 @@
           </a:lstStyle>
           <a:p>
             <a:r>
-              <a:rPr lang="en-US"/>
-              <a:t>Name of lecturer, institute, date</a:t>
+              <a:rPr lang="de-DE"/>
+              <a:t>Malte Wegener, HLPW6 Mini-Workshop, 11.06.2026</a:t>
             </a:r>
             <a:endParaRPr lang="de-DE" dirty="0"/>
           </a:p>
@@ -21955,8 +22029,8 @@
           </a:lstStyle>
           <a:p>
             <a:r>
-              <a:rPr lang="en-US"/>
-              <a:t>Name of lecturer, institute, date</a:t>
+              <a:rPr lang="de-DE"/>
+              <a:t>Malte Wegener, HLPW6 Mini-Workshop, 11.06.2026</a:t>
             </a:r>
             <a:endParaRPr lang="de-DE" dirty="0"/>
           </a:p>
@@ -22157,7 +22231,7 @@
           <a:p>
             <a:r>
               <a:rPr lang="de-DE"/>
-              <a:t>Name des Vortragenden, Institut, Datum</a:t>
+              <a:t>Malte Wegener, HLPW6 Mini-Workshop, 11.06.2026</a:t>
             </a:r>
             <a:endParaRPr lang="de-DE" dirty="0"/>
           </a:p>
@@ -22447,8 +22521,8 @@
           <a:lstStyle/>
           <a:p>
             <a:r>
-              <a:rPr lang="en-US"/>
-              <a:t>Name of lecturer, institute, date</a:t>
+              <a:rPr lang="de-DE"/>
+              <a:t>Malte Wegener, HLPW6 Mini-Workshop, 11.06.2026</a:t>
             </a:r>
             <a:endParaRPr lang="de-DE" dirty="0"/>
           </a:p>
@@ -24555,8 +24629,8 @@
           <a:lstStyle/>
           <a:p>
             <a:r>
-              <a:rPr lang="en-US"/>
-              <a:t>Name of lecturer, institute, date</a:t>
+              <a:rPr lang="de-DE"/>
+              <a:t>Malte Wegener, HLPW6 Mini-Workshop, 11.06.2026</a:t>
             </a:r>
             <a:endParaRPr lang="de-DE" dirty="0"/>
           </a:p>
@@ -25017,13 +25091,49 @@
           <a:lstStyle/>
           <a:p>
             <a:r>
-              <a:rPr lang="en-US"/>
-              <a:t>Name of lecturer, institute, date</a:t>
+              <a:rPr lang="de-DE"/>
+              <a:t>Malte Wegener, HLPW6 Mini-Workshop, 11.06.2026</a:t>
             </a:r>
             <a:endParaRPr lang="de-DE" dirty="0"/>
           </a:p>
         </p:txBody>
       </p:sp>
+      <p:pic>
+        <p:nvPicPr>
+          <p:cNvPr id="5" name="Graphic 4">
+            <a:extLst>
+              <a:ext uri="{FF2B5EF4-FFF2-40B4-BE49-F238E27FC236}">
+                <a16:creationId xmlns:a16="http://schemas.microsoft.com/office/drawing/2014/main" id="{04BDEE67-87AB-CD8A-4BFE-FCE7DFE6371F}"/>
+              </a:ext>
+            </a:extLst>
+          </p:cNvPr>
+          <p:cNvPicPr>
+            <a:picLocks noChangeAspect="1"/>
+          </p:cNvPicPr>
+          <p:nvPr userDrawn="1"/>
+        </p:nvPicPr>
+        <p:blipFill>
+          <a:blip r:embed="rId3">
+            <a:extLst>
+              <a:ext uri="{96DAC541-7B7A-43D3-8B79-37D633B846F1}">
+                <asvg:svgBlip xmlns:asvg="http://schemas.microsoft.com/office/drawing/2016/SVG/main" r:embed="rId4"/>
+              </a:ext>
+            </a:extLst>
+          </a:blip>
+          <a:stretch>
+            <a:fillRect/>
+          </a:stretch>
+        </p:blipFill>
+        <p:spPr>
+          <a:xfrm>
+            <a:off x="10037942" y="296190"/>
+            <a:ext cx="943879" cy="789426"/>
+          </a:xfrm>
+          <a:prstGeom prst="rect">
+            <a:avLst/>
+          </a:prstGeom>
+        </p:spPr>
+      </p:pic>
     </p:spTree>
     <p:extLst>
       <p:ext uri="{BB962C8B-B14F-4D97-AF65-F5344CB8AC3E}">
@@ -25643,8 +25753,8 @@
           <a:lstStyle/>
           <a:p>
             <a:r>
-              <a:rPr lang="en-US"/>
-              <a:t>Name of lecturer, institute, date</a:t>
+              <a:rPr lang="de-DE"/>
+              <a:t>Malte Wegener, HLPW6 Mini-Workshop, 11.06.2026</a:t>
             </a:r>
             <a:endParaRPr lang="de-DE" dirty="0"/>
           </a:p>
@@ -25714,6 +25824,42 @@
           </a:p>
         </p:txBody>
       </p:sp>
+      <p:pic>
+        <p:nvPicPr>
+          <p:cNvPr id="6" name="Graphic 5">
+            <a:extLst>
+              <a:ext uri="{FF2B5EF4-FFF2-40B4-BE49-F238E27FC236}">
+                <a16:creationId xmlns:a16="http://schemas.microsoft.com/office/drawing/2014/main" id="{58934B98-D3C6-1523-7041-8CA02F1D15CF}"/>
+              </a:ext>
+            </a:extLst>
+          </p:cNvPr>
+          <p:cNvPicPr>
+            <a:picLocks noChangeAspect="1"/>
+          </p:cNvPicPr>
+          <p:nvPr userDrawn="1"/>
+        </p:nvPicPr>
+        <p:blipFill>
+          <a:blip r:embed="rId3">
+            <a:extLst>
+              <a:ext uri="{96DAC541-7B7A-43D3-8B79-37D633B846F1}">
+                <asvg:svgBlip xmlns:asvg="http://schemas.microsoft.com/office/drawing/2016/SVG/main" r:embed="rId4"/>
+              </a:ext>
+            </a:extLst>
+          </a:blip>
+          <a:stretch>
+            <a:fillRect/>
+          </a:stretch>
+        </p:blipFill>
+        <p:spPr>
+          <a:xfrm>
+            <a:off x="10037942" y="301131"/>
+            <a:ext cx="943879" cy="789426"/>
+          </a:xfrm>
+          <a:prstGeom prst="rect">
+            <a:avLst/>
+          </a:prstGeom>
+        </p:spPr>
+      </p:pic>
     </p:spTree>
     <p:extLst>
       <p:ext uri="{BB962C8B-B14F-4D97-AF65-F5344CB8AC3E}">
@@ -26174,13 +26320,49 @@
           <a:lstStyle/>
           <a:p>
             <a:r>
-              <a:rPr lang="en-US"/>
-              <a:t>Name of lecturer, institute, date</a:t>
+              <a:rPr lang="de-DE"/>
+              <a:t>Malte Wegener, HLPW6 Mini-Workshop, 11.06.2026</a:t>
             </a:r>
             <a:endParaRPr lang="de-DE" dirty="0"/>
           </a:p>
         </p:txBody>
       </p:sp>
+      <p:pic>
+        <p:nvPicPr>
+          <p:cNvPr id="5" name="Graphic 4">
+            <a:extLst>
+              <a:ext uri="{FF2B5EF4-FFF2-40B4-BE49-F238E27FC236}">
+                <a16:creationId xmlns:a16="http://schemas.microsoft.com/office/drawing/2014/main" id="{CAD5437E-7A68-3A0C-6F31-D83BB066E347}"/>
+              </a:ext>
+            </a:extLst>
+          </p:cNvPr>
+          <p:cNvPicPr>
+            <a:picLocks noChangeAspect="1"/>
+          </p:cNvPicPr>
+          <p:nvPr userDrawn="1"/>
+        </p:nvPicPr>
+        <p:blipFill>
+          <a:blip r:embed="rId3">
+            <a:extLst>
+              <a:ext uri="{96DAC541-7B7A-43D3-8B79-37D633B846F1}">
+                <asvg:svgBlip xmlns:asvg="http://schemas.microsoft.com/office/drawing/2016/SVG/main" r:embed="rId4"/>
+              </a:ext>
+            </a:extLst>
+          </a:blip>
+          <a:stretch>
+            <a:fillRect/>
+          </a:stretch>
+        </p:blipFill>
+        <p:spPr>
+          <a:xfrm>
+            <a:off x="10037942" y="303826"/>
+            <a:ext cx="943879" cy="789426"/>
+          </a:xfrm>
+          <a:prstGeom prst="rect">
+            <a:avLst/>
+          </a:prstGeom>
+        </p:spPr>
+      </p:pic>
     </p:spTree>
     <p:extLst>
       <p:ext uri="{BB962C8B-B14F-4D97-AF65-F5344CB8AC3E}">
@@ -27067,8 +27249,8 @@
           <a:lstStyle/>
           <a:p>
             <a:r>
-              <a:rPr lang="en-US"/>
-              <a:t>Name of lecturer, institute, date</a:t>
+              <a:rPr lang="de-DE"/>
+              <a:t>Malte Wegener, HLPW6 Mini-Workshop, 11.06.2026</a:t>
             </a:r>
             <a:endParaRPr lang="de-DE" dirty="0"/>
           </a:p>
@@ -27596,8 +27778,8 @@
           <a:lstStyle/>
           <a:p>
             <a:r>
-              <a:rPr lang="en-US" dirty="0"/>
-              <a:t>Name of lecturer, institute, date</a:t>
+              <a:rPr lang="de-DE"/>
+              <a:t>Malte Wegener, HLPW6 Mini-Workshop, 11.06.2026</a:t>
             </a:r>
             <a:endParaRPr lang="de-DE" dirty="0"/>
           </a:p>
@@ -27980,8 +28162,8 @@
           </a:lstStyle>
           <a:p>
             <a:r>
-              <a:rPr lang="en-US"/>
-              <a:t>Name of lecturer, institute, date</a:t>
+              <a:rPr lang="de-DE"/>
+              <a:t>Malte Wegener, HLPW6 Mini-Workshop, 11.06.2026</a:t>
             </a:r>
             <a:endParaRPr lang="de-DE" dirty="0"/>
           </a:p>
@@ -28279,8 +28461,8 @@
           </a:lstStyle>
           <a:p>
             <a:r>
-              <a:rPr lang="en-US"/>
-              <a:t>Name of lecturer, institute, date</a:t>
+              <a:rPr lang="de-DE"/>
+              <a:t>Malte Wegener, HLPW6 Mini-Workshop, 11.06.2026</a:t>
             </a:r>
             <a:endParaRPr lang="de-DE" dirty="0"/>
           </a:p>
@@ -29357,14 +29539,56 @@
           <a:lstStyle/>
           <a:p>
             <a:r>
+              <a:rPr lang="en-US" u="sng" dirty="0"/>
+              <a:t>Malte Wegener</a:t>
+            </a:r>
+            <a:r>
               <a:rPr lang="en-US" dirty="0"/>
-              <a:t>Malte Wegener, Prahladh Iyer, Boris Diskin, Dimitry Kamenetsky, Mike Park, Axel Schwöppe, Mohamed </a:t>
+              <a:t>*, Prahladh Iyer</a:t>
+            </a:r>
+            <a:r>
+              <a:rPr lang="en-US" baseline="30000" dirty="0"/>
+              <a:t>†</a:t>
+            </a:r>
+            <a:r>
+              <a:rPr lang="en-US" dirty="0"/>
+              <a:t>, Boris Diskin</a:t>
+            </a:r>
+            <a:r>
+              <a:rPr lang="en-US" baseline="30000" dirty="0"/>
+              <a:t>†</a:t>
+            </a:r>
+            <a:r>
+              <a:rPr lang="en-US" dirty="0"/>
+              <a:t>, Dimitry Kamenetsky</a:t>
+            </a:r>
+            <a:r>
+              <a:rPr lang="en-US" baseline="30000" dirty="0"/>
+              <a:t>‡</a:t>
+            </a:r>
+            <a:r>
+              <a:rPr lang="en-US" dirty="0"/>
+              <a:t>, Mike Park</a:t>
+            </a:r>
+            <a:r>
+              <a:rPr lang="en-US" baseline="30000" dirty="0"/>
+              <a:t>‖</a:t>
+            </a:r>
+            <a:r>
+              <a:rPr lang="en-US" dirty="0"/>
+              <a:t>, Mohamed </a:t>
             </a:r>
             <a:r>
               <a:rPr lang="en-US" dirty="0" err="1"/>
               <a:t>Sereez</a:t>
             </a:r>
-            <a:endParaRPr lang="en-US" dirty="0"/>
+            <a:r>
+              <a:rPr lang="en-US" baseline="30000" dirty="0"/>
+              <a:t>#</a:t>
+            </a:r>
+          </a:p>
+          <a:p>
+            <a:endParaRPr lang="en-US" baseline="30000" dirty="0"/>
           </a:p>
         </p:txBody>
       </p:sp>
@@ -29448,10 +29672,77 @@
           <a:lstStyle/>
           <a:p>
             <a:r>
-              <a:rPr lang="en-US"/>
-              <a:t>Name of lecturer, institute, date</a:t>
+              <a:rPr lang="de-DE"/>
+              <a:t>Malte Wegener, HLPW6 Mini-Workshop, 11.06.2026</a:t>
             </a:r>
             <a:endParaRPr lang="de-DE" dirty="0"/>
+          </a:p>
+        </p:txBody>
+      </p:sp>
+      <p:sp>
+        <p:nvSpPr>
+          <p:cNvPr id="6" name="TextBox 5">
+            <a:extLst>
+              <a:ext uri="{FF2B5EF4-FFF2-40B4-BE49-F238E27FC236}">
+                <a16:creationId xmlns:a16="http://schemas.microsoft.com/office/drawing/2014/main" id="{0C25B7DE-A92F-AADF-D18F-A4DD2D2DC052}"/>
+              </a:ext>
+            </a:extLst>
+          </p:cNvPr>
+          <p:cNvSpPr txBox="1"/>
+          <p:nvPr/>
+        </p:nvSpPr>
+        <p:spPr>
+          <a:xfrm>
+            <a:off x="1560576" y="5053584"/>
+            <a:ext cx="5785104" cy="1292662"/>
+          </a:xfrm>
+          <a:prstGeom prst="rect">
+            <a:avLst/>
+          </a:prstGeom>
+          <a:noFill/>
+        </p:spPr>
+        <p:txBody>
+          <a:bodyPr wrap="square" rtlCol="0">
+            <a:spAutoFit/>
+          </a:bodyPr>
+          <a:lstStyle/>
+          <a:p>
+            <a:r>
+              <a:rPr lang="en-US" baseline="30000" dirty="0"/>
+              <a:t>* German Aerospace Center, Institute of Aerodynamics and Flow Technology</a:t>
+            </a:r>
+          </a:p>
+          <a:p>
+            <a:r>
+              <a:rPr lang="en-US" baseline="30000" dirty="0"/>
+              <a:t>† NASA, Langley Research Center</a:t>
+            </a:r>
+          </a:p>
+          <a:p>
+            <a:r>
+              <a:rPr lang="en-US" baseline="30000" dirty="0"/>
+              <a:t>‡ The Boeing Company</a:t>
+            </a:r>
+          </a:p>
+          <a:p>
+            <a:r>
+              <a:rPr lang="en-US" baseline="30000" dirty="0"/>
+              <a:t>‖ </a:t>
+            </a:r>
+            <a:r>
+              <a:rPr lang="en-US" baseline="30000" dirty="0" err="1"/>
+              <a:t>FlexCompute</a:t>
+            </a:r>
+            <a:endParaRPr lang="en-US" baseline="30000" dirty="0"/>
+          </a:p>
+          <a:p>
+            <a:r>
+              <a:rPr lang="en-US" baseline="30000" dirty="0"/>
+              <a:t># De Montfort University</a:t>
+            </a:r>
+          </a:p>
+          <a:p>
+            <a:endParaRPr lang="en-US" dirty="0"/>
           </a:p>
         </p:txBody>
       </p:sp>
@@ -29604,8 +29895,8 @@
           <a:lstStyle/>
           <a:p>
             <a:r>
-              <a:rPr lang="en-US"/>
-              <a:t>Name of lecturer, institute, date</a:t>
+              <a:rPr lang="de-DE"/>
+              <a:t>Malte Wegener, HLPW6 Mini-Workshop, 11.06.2026</a:t>
             </a:r>
             <a:endParaRPr lang="de-DE" dirty="0"/>
           </a:p>
@@ -29633,59 +29924,19 @@
               </a:ext>
             </a:extLst>
           </a:blip>
-          <a:stretch>
-            <a:fillRect/>
-          </a:stretch>
+          <a:srcRect/>
+          <a:stretch/>
         </p:blipFill>
         <p:spPr>
           <a:xfrm>
             <a:off x="5945093" y="1403330"/>
-            <a:ext cx="5498211" cy="4887742"/>
+            <a:ext cx="5498211" cy="4887741"/>
           </a:xfrm>
           <a:prstGeom prst="rect">
             <a:avLst/>
           </a:prstGeom>
         </p:spPr>
       </p:pic>
-      <p:sp>
-        <p:nvSpPr>
-          <p:cNvPr id="8" name="TextBox 7">
-            <a:extLst>
-              <a:ext uri="{FF2B5EF4-FFF2-40B4-BE49-F238E27FC236}">
-                <a16:creationId xmlns:a16="http://schemas.microsoft.com/office/drawing/2014/main" id="{2A82989A-7175-46C8-3526-935D73F5078C}"/>
-              </a:ext>
-            </a:extLst>
-          </p:cNvPr>
-          <p:cNvSpPr txBox="1"/>
-          <p:nvPr/>
-        </p:nvSpPr>
-        <p:spPr>
-          <a:xfrm>
-            <a:off x="7468712" y="4869895"/>
-            <a:ext cx="3974592" cy="584775"/>
-          </a:xfrm>
-          <a:prstGeom prst="rect">
-            <a:avLst/>
-          </a:prstGeom>
-          <a:noFill/>
-        </p:spPr>
-        <p:txBody>
-          <a:bodyPr wrap="square" rtlCol="0">
-            <a:spAutoFit/>
-          </a:bodyPr>
-          <a:lstStyle/>
-          <a:p>
-            <a:r>
-              <a:rPr lang="en-US" sz="3200" dirty="0">
-                <a:solidFill>
-                  <a:srgbClr val="FF0000"/>
-                </a:solidFill>
-              </a:rPr>
-              <a:t>TEMPORARY</a:t>
-            </a:r>
-          </a:p>
-        </p:txBody>
-      </p:sp>
     </p:spTree>
     <p:extLst>
       <p:ext uri="{BB962C8B-B14F-4D97-AF65-F5344CB8AC3E}">
@@ -29868,8 +30119,8 @@
           <a:lstStyle/>
           <a:p>
             <a:r>
-              <a:rPr lang="en-US"/>
-              <a:t>Name of lecturer, institute, date</a:t>
+              <a:rPr lang="de-DE"/>
+              <a:t>Malte Wegener, HLPW6 Mini-Workshop, 11.06.2026</a:t>
             </a:r>
             <a:endParaRPr lang="de-DE" dirty="0"/>
           </a:p>
@@ -29949,6 +30200,117 @@
   <p:clrMapOvr>
     <a:masterClrMapping/>
   </p:clrMapOvr>
+  <p:timing>
+    <p:tnLst>
+      <p:par>
+        <p:cTn id="1" dur="indefinite" restart="never" nodeType="tmRoot">
+          <p:childTnLst>
+            <p:seq concurrent="1" nextAc="seek">
+              <p:cTn id="2" dur="indefinite" nodeType="mainSeq">
+                <p:childTnLst>
+                  <p:par>
+                    <p:cTn id="3" fill="hold">
+                      <p:stCondLst>
+                        <p:cond delay="indefinite"/>
+                      </p:stCondLst>
+                      <p:childTnLst>
+                        <p:par>
+                          <p:cTn id="4" fill="hold">
+                            <p:stCondLst>
+                              <p:cond delay="0"/>
+                            </p:stCondLst>
+                            <p:childTnLst>
+                              <p:par>
+                                <p:cTn id="5" presetID="1" presetClass="entr" presetSubtype="0" fill="hold" grpId="0" nodeType="clickEffect">
+                                  <p:stCondLst>
+                                    <p:cond delay="0"/>
+                                  </p:stCondLst>
+                                  <p:childTnLst>
+                                    <p:set>
+                                      <p:cBhvr>
+                                        <p:cTn id="6" dur="1" fill="hold">
+                                          <p:stCondLst>
+                                            <p:cond delay="0"/>
+                                          </p:stCondLst>
+                                        </p:cTn>
+                                        <p:tgtEl>
+                                          <p:spTgt spid="5">
+                                            <p:bg/>
+                                          </p:spTgt>
+                                        </p:tgtEl>
+                                        <p:attrNameLst>
+                                          <p:attrName>style.visibility</p:attrName>
+                                        </p:attrNameLst>
+                                      </p:cBhvr>
+                                      <p:to>
+                                        <p:strVal val="visible"/>
+                                      </p:to>
+                                    </p:set>
+                                  </p:childTnLst>
+                                </p:cTn>
+                              </p:par>
+                              <p:par>
+                                <p:cTn id="7" presetID="1" presetClass="entr" presetSubtype="0" fill="hold" grpId="0" nodeType="withEffect">
+                                  <p:stCondLst>
+                                    <p:cond delay="0"/>
+                                  </p:stCondLst>
+                                  <p:childTnLst>
+                                    <p:set>
+                                      <p:cBhvr>
+                                        <p:cTn id="8" dur="1" fill="hold">
+                                          <p:stCondLst>
+                                            <p:cond delay="0"/>
+                                          </p:stCondLst>
+                                        </p:cTn>
+                                        <p:tgtEl>
+                                          <p:spTgt spid="5">
+                                            <p:txEl>
+                                              <p:pRg st="0" end="0"/>
+                                            </p:txEl>
+                                          </p:spTgt>
+                                        </p:tgtEl>
+                                        <p:attrNameLst>
+                                          <p:attrName>style.visibility</p:attrName>
+                                        </p:attrNameLst>
+                                      </p:cBhvr>
+                                      <p:to>
+                                        <p:strVal val="visible"/>
+                                      </p:to>
+                                    </p:set>
+                                  </p:childTnLst>
+                                </p:cTn>
+                              </p:par>
+                            </p:childTnLst>
+                          </p:cTn>
+                        </p:par>
+                      </p:childTnLst>
+                    </p:cTn>
+                  </p:par>
+                </p:childTnLst>
+              </p:cTn>
+              <p:prevCondLst>
+                <p:cond evt="onPrev" delay="0">
+                  <p:tgtEl>
+                    <p:sldTgt/>
+                  </p:tgtEl>
+                </p:cond>
+              </p:prevCondLst>
+              <p:nextCondLst>
+                <p:cond evt="onNext" delay="0">
+                  <p:tgtEl>
+                    <p:sldTgt/>
+                  </p:tgtEl>
+                </p:cond>
+              </p:nextCondLst>
+            </p:seq>
+          </p:childTnLst>
+        </p:cTn>
+      </p:par>
+    </p:tnLst>
+    <p:bldLst>
+      <p:bldP spid="5" grpId="0" uiExpand="1" build="p" animBg="1"/>
+    </p:bldLst>
+  </p:timing>
 </p:sld>
 </file>
 
@@ -30094,8 +30456,8 @@
           <a:lstStyle/>
           <a:p>
             <a:r>
-              <a:rPr lang="en-US"/>
-              <a:t>Name of lecturer, institute, date</a:t>
+              <a:rPr lang="de-DE"/>
+              <a:t>Malte Wegener, HLPW6 Mini-Workshop, 11.06.2026</a:t>
             </a:r>
             <a:endParaRPr lang="de-DE" dirty="0"/>
           </a:p>
@@ -30123,7 +30485,7 @@
               </a:ext>
             </a:extLst>
           </a:blip>
-          <a:srcRect l="1063" t="1373" r="1182" b="1767"/>
+          <a:srcRect t="458" b="458"/>
           <a:stretch/>
         </p:blipFill>
         <p:spPr>
@@ -30272,7 +30634,7 @@
         </p:blipFill>
         <p:spPr>
           <a:xfrm>
-            <a:off x="9729759" y="563354"/>
+            <a:off x="10383196" y="1118709"/>
             <a:ext cx="1305466" cy="1160520"/>
           </a:xfrm>
           <a:prstGeom prst="rect">
@@ -30378,8 +30740,8 @@
         </p:nvCxnSpPr>
         <p:spPr>
           <a:xfrm flipH="1">
-            <a:off x="9648493" y="1723874"/>
-            <a:ext cx="479248" cy="800480"/>
+            <a:off x="9648493" y="2119141"/>
+            <a:ext cx="734702" cy="405213"/>
           </a:xfrm>
           <a:prstGeom prst="straightConnector1">
             <a:avLst/>
@@ -30496,8 +30858,8 @@
         </p:nvCxnSpPr>
         <p:spPr>
           <a:xfrm flipV="1">
-            <a:off x="7262966" y="3142832"/>
-            <a:ext cx="1655482" cy="370090"/>
+            <a:off x="7262966" y="3127248"/>
+            <a:ext cx="1655482" cy="385674"/>
           </a:xfrm>
           <a:prstGeom prst="straightConnector1">
             <a:avLst/>
@@ -30612,8 +30974,8 @@
         </p:nvSpPr>
         <p:spPr>
           <a:xfrm>
-            <a:off x="7551420" y="2948940"/>
-            <a:ext cx="455467" cy="1352714"/>
+            <a:off x="7595615" y="3059106"/>
+            <a:ext cx="341377" cy="1086173"/>
           </a:xfrm>
           <a:prstGeom prst="ellipse">
             <a:avLst/>
@@ -30681,7 +31043,7 @@
                             </p:stCondLst>
                             <p:childTnLst>
                               <p:par>
-                                <p:cTn id="5" presetID="1" presetClass="entr" presetSubtype="0" fill="hold" grpId="0" nodeType="clickEffect">
+                                <p:cTn id="5" presetID="1" presetClass="entr" presetSubtype="0" fill="hold" nodeType="clickEffect">
                                   <p:stCondLst>
                                     <p:cond delay="0"/>
                                   </p:stCondLst>
@@ -30689,6 +31051,473 @@
                                     <p:set>
                                       <p:cBhvr>
                                         <p:cTn id="6" dur="1" fill="hold">
+                                          <p:stCondLst>
+                                            <p:cond delay="0"/>
+                                          </p:stCondLst>
+                                        </p:cTn>
+                                        <p:tgtEl>
+                                          <p:spTgt spid="3">
+                                            <p:txEl>
+                                              <p:pRg st="1" end="1"/>
+                                            </p:txEl>
+                                          </p:spTgt>
+                                        </p:tgtEl>
+                                        <p:attrNameLst>
+                                          <p:attrName>style.visibility</p:attrName>
+                                        </p:attrNameLst>
+                                      </p:cBhvr>
+                                      <p:to>
+                                        <p:strVal val="visible"/>
+                                      </p:to>
+                                    </p:set>
+                                  </p:childTnLst>
+                                </p:cTn>
+                              </p:par>
+                            </p:childTnLst>
+                          </p:cTn>
+                        </p:par>
+                      </p:childTnLst>
+                    </p:cTn>
+                  </p:par>
+                  <p:par>
+                    <p:cTn id="7" fill="hold">
+                      <p:stCondLst>
+                        <p:cond delay="indefinite"/>
+                      </p:stCondLst>
+                      <p:childTnLst>
+                        <p:par>
+                          <p:cTn id="8" fill="hold">
+                            <p:stCondLst>
+                              <p:cond delay="0"/>
+                            </p:stCondLst>
+                            <p:childTnLst>
+                              <p:par>
+                                <p:cTn id="9" presetID="1" presetClass="entr" presetSubtype="0" fill="hold" nodeType="clickEffect">
+                                  <p:stCondLst>
+                                    <p:cond delay="0"/>
+                                  </p:stCondLst>
+                                  <p:childTnLst>
+                                    <p:set>
+                                      <p:cBhvr>
+                                        <p:cTn id="10" dur="1" fill="hold">
+                                          <p:stCondLst>
+                                            <p:cond delay="0"/>
+                                          </p:stCondLst>
+                                        </p:cTn>
+                                        <p:tgtEl>
+                                          <p:spTgt spid="8"/>
+                                        </p:tgtEl>
+                                        <p:attrNameLst>
+                                          <p:attrName>style.visibility</p:attrName>
+                                        </p:attrNameLst>
+                                      </p:cBhvr>
+                                      <p:to>
+                                        <p:strVal val="visible"/>
+                                      </p:to>
+                                    </p:set>
+                                  </p:childTnLst>
+                                </p:cTn>
+                              </p:par>
+                              <p:par>
+                                <p:cTn id="11" presetID="1" presetClass="entr" presetSubtype="0" fill="hold" nodeType="withEffect">
+                                  <p:stCondLst>
+                                    <p:cond delay="0"/>
+                                  </p:stCondLst>
+                                  <p:childTnLst>
+                                    <p:set>
+                                      <p:cBhvr>
+                                        <p:cTn id="12" dur="1" fill="hold">
+                                          <p:stCondLst>
+                                            <p:cond delay="0"/>
+                                          </p:stCondLst>
+                                        </p:cTn>
+                                        <p:tgtEl>
+                                          <p:spTgt spid="9"/>
+                                        </p:tgtEl>
+                                        <p:attrNameLst>
+                                          <p:attrName>style.visibility</p:attrName>
+                                        </p:attrNameLst>
+                                      </p:cBhvr>
+                                      <p:to>
+                                        <p:strVal val="visible"/>
+                                      </p:to>
+                                    </p:set>
+                                  </p:childTnLst>
+                                </p:cTn>
+                              </p:par>
+                              <p:par>
+                                <p:cTn id="13" presetID="1" presetClass="entr" presetSubtype="0" fill="hold" nodeType="withEffect">
+                                  <p:stCondLst>
+                                    <p:cond delay="0"/>
+                                  </p:stCondLst>
+                                  <p:childTnLst>
+                                    <p:set>
+                                      <p:cBhvr>
+                                        <p:cTn id="14" dur="1" fill="hold">
+                                          <p:stCondLst>
+                                            <p:cond delay="0"/>
+                                          </p:stCondLst>
+                                        </p:cTn>
+                                        <p:tgtEl>
+                                          <p:spTgt spid="13"/>
+                                        </p:tgtEl>
+                                        <p:attrNameLst>
+                                          <p:attrName>style.visibility</p:attrName>
+                                        </p:attrNameLst>
+                                      </p:cBhvr>
+                                      <p:to>
+                                        <p:strVal val="visible"/>
+                                      </p:to>
+                                    </p:set>
+                                  </p:childTnLst>
+                                </p:cTn>
+                              </p:par>
+                              <p:par>
+                                <p:cTn id="15" presetID="1" presetClass="entr" presetSubtype="0" fill="hold" nodeType="withEffect">
+                                  <p:stCondLst>
+                                    <p:cond delay="0"/>
+                                  </p:stCondLst>
+                                  <p:childTnLst>
+                                    <p:set>
+                                      <p:cBhvr>
+                                        <p:cTn id="16" dur="1" fill="hold">
+                                          <p:stCondLst>
+                                            <p:cond delay="0"/>
+                                          </p:stCondLst>
+                                        </p:cTn>
+                                        <p:tgtEl>
+                                          <p:spTgt spid="15"/>
+                                        </p:tgtEl>
+                                        <p:attrNameLst>
+                                          <p:attrName>style.visibility</p:attrName>
+                                        </p:attrNameLst>
+                                      </p:cBhvr>
+                                      <p:to>
+                                        <p:strVal val="visible"/>
+                                      </p:to>
+                                    </p:set>
+                                  </p:childTnLst>
+                                </p:cTn>
+                              </p:par>
+                              <p:par>
+                                <p:cTn id="17" presetID="1" presetClass="entr" presetSubtype="0" fill="hold" nodeType="withEffect">
+                                  <p:stCondLst>
+                                    <p:cond delay="0"/>
+                                  </p:stCondLst>
+                                  <p:childTnLst>
+                                    <p:set>
+                                      <p:cBhvr>
+                                        <p:cTn id="18" dur="1" fill="hold">
+                                          <p:stCondLst>
+                                            <p:cond delay="0"/>
+                                          </p:stCondLst>
+                                        </p:cTn>
+                                        <p:tgtEl>
+                                          <p:spTgt spid="16"/>
+                                        </p:tgtEl>
+                                        <p:attrNameLst>
+                                          <p:attrName>style.visibility</p:attrName>
+                                        </p:attrNameLst>
+                                      </p:cBhvr>
+                                      <p:to>
+                                        <p:strVal val="visible"/>
+                                      </p:to>
+                                    </p:set>
+                                  </p:childTnLst>
+                                </p:cTn>
+                              </p:par>
+                              <p:par>
+                                <p:cTn id="19" presetID="1" presetClass="entr" presetSubtype="0" fill="hold" nodeType="withEffect">
+                                  <p:stCondLst>
+                                    <p:cond delay="0"/>
+                                  </p:stCondLst>
+                                  <p:childTnLst>
+                                    <p:set>
+                                      <p:cBhvr>
+                                        <p:cTn id="20" dur="1" fill="hold">
+                                          <p:stCondLst>
+                                            <p:cond delay="0"/>
+                                          </p:stCondLst>
+                                        </p:cTn>
+                                        <p:tgtEl>
+                                          <p:spTgt spid="21"/>
+                                        </p:tgtEl>
+                                        <p:attrNameLst>
+                                          <p:attrName>style.visibility</p:attrName>
+                                        </p:attrNameLst>
+                                      </p:cBhvr>
+                                      <p:to>
+                                        <p:strVal val="visible"/>
+                                      </p:to>
+                                    </p:set>
+                                  </p:childTnLst>
+                                </p:cTn>
+                              </p:par>
+                              <p:par>
+                                <p:cTn id="21" presetID="1" presetClass="entr" presetSubtype="0" fill="hold" nodeType="withEffect">
+                                  <p:stCondLst>
+                                    <p:cond delay="0"/>
+                                  </p:stCondLst>
+                                  <p:childTnLst>
+                                    <p:set>
+                                      <p:cBhvr>
+                                        <p:cTn id="22" dur="1" fill="hold">
+                                          <p:stCondLst>
+                                            <p:cond delay="0"/>
+                                          </p:stCondLst>
+                                        </p:cTn>
+                                        <p:tgtEl>
+                                          <p:spTgt spid="26"/>
+                                        </p:tgtEl>
+                                        <p:attrNameLst>
+                                          <p:attrName>style.visibility</p:attrName>
+                                        </p:attrNameLst>
+                                      </p:cBhvr>
+                                      <p:to>
+                                        <p:strVal val="visible"/>
+                                      </p:to>
+                                    </p:set>
+                                  </p:childTnLst>
+                                </p:cTn>
+                              </p:par>
+                              <p:par>
+                                <p:cTn id="23" presetID="1" presetClass="entr" presetSubtype="0" fill="hold" nodeType="withEffect">
+                                  <p:stCondLst>
+                                    <p:cond delay="0"/>
+                                  </p:stCondLst>
+                                  <p:childTnLst>
+                                    <p:set>
+                                      <p:cBhvr>
+                                        <p:cTn id="24" dur="1" fill="hold">
+                                          <p:stCondLst>
+                                            <p:cond delay="0"/>
+                                          </p:stCondLst>
+                                        </p:cTn>
+                                        <p:tgtEl>
+                                          <p:spTgt spid="27"/>
+                                        </p:tgtEl>
+                                        <p:attrNameLst>
+                                          <p:attrName>style.visibility</p:attrName>
+                                        </p:attrNameLst>
+                                      </p:cBhvr>
+                                      <p:to>
+                                        <p:strVal val="visible"/>
+                                      </p:to>
+                                    </p:set>
+                                  </p:childTnLst>
+                                </p:cTn>
+                              </p:par>
+                              <p:par>
+                                <p:cTn id="25" presetID="1" presetClass="entr" presetSubtype="0" fill="hold" nodeType="withEffect">
+                                  <p:stCondLst>
+                                    <p:cond delay="0"/>
+                                  </p:stCondLst>
+                                  <p:childTnLst>
+                                    <p:set>
+                                      <p:cBhvr>
+                                        <p:cTn id="26" dur="1" fill="hold">
+                                          <p:stCondLst>
+                                            <p:cond delay="0"/>
+                                          </p:stCondLst>
+                                        </p:cTn>
+                                        <p:tgtEl>
+                                          <p:spTgt spid="32"/>
+                                        </p:tgtEl>
+                                        <p:attrNameLst>
+                                          <p:attrName>style.visibility</p:attrName>
+                                        </p:attrNameLst>
+                                      </p:cBhvr>
+                                      <p:to>
+                                        <p:strVal val="visible"/>
+                                      </p:to>
+                                    </p:set>
+                                  </p:childTnLst>
+                                </p:cTn>
+                              </p:par>
+                              <p:par>
+                                <p:cTn id="27" presetID="1" presetClass="entr" presetSubtype="0" fill="hold" nodeType="withEffect">
+                                  <p:stCondLst>
+                                    <p:cond delay="0"/>
+                                  </p:stCondLst>
+                                  <p:childTnLst>
+                                    <p:set>
+                                      <p:cBhvr>
+                                        <p:cTn id="28" dur="1" fill="hold">
+                                          <p:stCondLst>
+                                            <p:cond delay="0"/>
+                                          </p:stCondLst>
+                                        </p:cTn>
+                                        <p:tgtEl>
+                                          <p:spTgt spid="10"/>
+                                        </p:tgtEl>
+                                        <p:attrNameLst>
+                                          <p:attrName>style.visibility</p:attrName>
+                                        </p:attrNameLst>
+                                      </p:cBhvr>
+                                      <p:to>
+                                        <p:strVal val="visible"/>
+                                      </p:to>
+                                    </p:set>
+                                  </p:childTnLst>
+                                </p:cTn>
+                              </p:par>
+                              <p:par>
+                                <p:cTn id="29" presetID="1" presetClass="entr" presetSubtype="0" fill="hold" nodeType="withEffect">
+                                  <p:stCondLst>
+                                    <p:cond delay="0"/>
+                                  </p:stCondLst>
+                                  <p:childTnLst>
+                                    <p:set>
+                                      <p:cBhvr>
+                                        <p:cTn id="30" dur="1" fill="hold">
+                                          <p:stCondLst>
+                                            <p:cond delay="0"/>
+                                          </p:stCondLst>
+                                        </p:cTn>
+                                        <p:tgtEl>
+                                          <p:spTgt spid="7"/>
+                                        </p:tgtEl>
+                                        <p:attrNameLst>
+                                          <p:attrName>style.visibility</p:attrName>
+                                        </p:attrNameLst>
+                                      </p:cBhvr>
+                                      <p:to>
+                                        <p:strVal val="visible"/>
+                                      </p:to>
+                                    </p:set>
+                                  </p:childTnLst>
+                                </p:cTn>
+                              </p:par>
+                              <p:par>
+                                <p:cTn id="31" presetID="1" presetClass="entr" presetSubtype="0" fill="hold" nodeType="withEffect">
+                                  <p:stCondLst>
+                                    <p:cond delay="0"/>
+                                  </p:stCondLst>
+                                  <p:childTnLst>
+                                    <p:set>
+                                      <p:cBhvr>
+                                        <p:cTn id="32" dur="1" fill="hold">
+                                          <p:stCondLst>
+                                            <p:cond delay="0"/>
+                                          </p:stCondLst>
+                                        </p:cTn>
+                                        <p:tgtEl>
+                                          <p:spTgt spid="11"/>
+                                        </p:tgtEl>
+                                        <p:attrNameLst>
+                                          <p:attrName>style.visibility</p:attrName>
+                                        </p:attrNameLst>
+                                      </p:cBhvr>
+                                      <p:to>
+                                        <p:strVal val="visible"/>
+                                      </p:to>
+                                    </p:set>
+                                  </p:childTnLst>
+                                </p:cTn>
+                              </p:par>
+                              <p:par>
+                                <p:cTn id="33" presetID="1" presetClass="entr" presetSubtype="0" fill="hold" nodeType="withEffect">
+                                  <p:stCondLst>
+                                    <p:cond delay="0"/>
+                                  </p:stCondLst>
+                                  <p:childTnLst>
+                                    <p:set>
+                                      <p:cBhvr>
+                                        <p:cTn id="34" dur="1" fill="hold">
+                                          <p:stCondLst>
+                                            <p:cond delay="0"/>
+                                          </p:stCondLst>
+                                        </p:cTn>
+                                        <p:tgtEl>
+                                          <p:spTgt spid="31"/>
+                                        </p:tgtEl>
+                                        <p:attrNameLst>
+                                          <p:attrName>style.visibility</p:attrName>
+                                        </p:attrNameLst>
+                                      </p:cBhvr>
+                                      <p:to>
+                                        <p:strVal val="visible"/>
+                                      </p:to>
+                                    </p:set>
+                                  </p:childTnLst>
+                                </p:cTn>
+                              </p:par>
+                            </p:childTnLst>
+                          </p:cTn>
+                        </p:par>
+                      </p:childTnLst>
+                    </p:cTn>
+                  </p:par>
+                  <p:par>
+                    <p:cTn id="35" fill="hold">
+                      <p:stCondLst>
+                        <p:cond delay="indefinite"/>
+                      </p:stCondLst>
+                      <p:childTnLst>
+                        <p:par>
+                          <p:cTn id="36" fill="hold">
+                            <p:stCondLst>
+                              <p:cond delay="0"/>
+                            </p:stCondLst>
+                            <p:childTnLst>
+                              <p:par>
+                                <p:cTn id="37" presetID="1" presetClass="entr" presetSubtype="0" fill="hold" nodeType="clickEffect">
+                                  <p:stCondLst>
+                                    <p:cond delay="0"/>
+                                  </p:stCondLst>
+                                  <p:childTnLst>
+                                    <p:set>
+                                      <p:cBhvr>
+                                        <p:cTn id="38" dur="1" fill="hold">
+                                          <p:stCondLst>
+                                            <p:cond delay="0"/>
+                                          </p:stCondLst>
+                                        </p:cTn>
+                                        <p:tgtEl>
+                                          <p:spTgt spid="3">
+                                            <p:txEl>
+                                              <p:pRg st="2" end="2"/>
+                                            </p:txEl>
+                                          </p:spTgt>
+                                        </p:tgtEl>
+                                        <p:attrNameLst>
+                                          <p:attrName>style.visibility</p:attrName>
+                                        </p:attrNameLst>
+                                      </p:cBhvr>
+                                      <p:to>
+                                        <p:strVal val="visible"/>
+                                      </p:to>
+                                    </p:set>
+                                  </p:childTnLst>
+                                </p:cTn>
+                              </p:par>
+                            </p:childTnLst>
+                          </p:cTn>
+                        </p:par>
+                      </p:childTnLst>
+                    </p:cTn>
+                  </p:par>
+                  <p:par>
+                    <p:cTn id="39" fill="hold">
+                      <p:stCondLst>
+                        <p:cond delay="indefinite"/>
+                      </p:stCondLst>
+                      <p:childTnLst>
+                        <p:par>
+                          <p:cTn id="40" fill="hold">
+                            <p:stCondLst>
+                              <p:cond delay="0"/>
+                            </p:stCondLst>
+                            <p:childTnLst>
+                              <p:par>
+                                <p:cTn id="41" presetID="1" presetClass="entr" presetSubtype="0" fill="hold" grpId="0" nodeType="clickEffect">
+                                  <p:stCondLst>
+                                    <p:cond delay="0"/>
+                                  </p:stCondLst>
+                                  <p:childTnLst>
+                                    <p:set>
+                                      <p:cBhvr>
+                                        <p:cTn id="42" dur="1" fill="hold">
                                           <p:stCondLst>
                                             <p:cond delay="0"/>
                                           </p:stCondLst>
@@ -30874,8 +31703,8 @@
           <a:lstStyle/>
           <a:p>
             <a:r>
-              <a:rPr lang="en-US"/>
-              <a:t>Name of lecturer, institute, date</a:t>
+              <a:rPr lang="de-DE"/>
+              <a:t>Malte Wegener, HLPW6 Mini-Workshop, 11.06.2026</a:t>
             </a:r>
             <a:endParaRPr lang="de-DE" dirty="0"/>
           </a:p>
@@ -30903,14 +31732,13 @@
               </a:ext>
             </a:extLst>
           </a:blip>
-          <a:stretch>
-            <a:fillRect/>
-          </a:stretch>
+          <a:srcRect/>
+          <a:stretch/>
         </p:blipFill>
         <p:spPr>
           <a:xfrm>
             <a:off x="5855566" y="1242399"/>
-            <a:ext cx="5940194" cy="5280651"/>
+            <a:ext cx="5940193" cy="5280651"/>
           </a:xfrm>
           <a:prstGeom prst="rect">
             <a:avLst/>
@@ -31009,7 +31837,7 @@
           <a:p>
             <a:r>
               <a:rPr lang="en-US" dirty="0"/>
-              <a:t>The low-lift solution can be found by 5 different spatial </a:t>
+              <a:t>The low-lift solution can be found by 6 different spatial </a:t>
             </a:r>
             <a:r>
               <a:rPr lang="en-US" dirty="0" err="1"/>
@@ -31017,7 +31845,7 @@
             </a:r>
             <a:r>
               <a:rPr lang="en-US" dirty="0"/>
-              <a:t> on 4 different mesh families</a:t>
+              <a:t> on 5 different mesh families</a:t>
             </a:r>
           </a:p>
           <a:p>
@@ -31077,8 +31905,8 @@
           <a:lstStyle/>
           <a:p>
             <a:r>
-              <a:rPr lang="en-US"/>
-              <a:t>Name of lecturer, institute, date</a:t>
+              <a:rPr lang="de-DE"/>
+              <a:t>Malte Wegener, HLPW6 Mini-Workshop, 11.06.2026</a:t>
             </a:r>
             <a:endParaRPr lang="de-DE" dirty="0"/>
           </a:p>
@@ -31112,7 +31940,7 @@
         <p:spPr>
           <a:xfrm>
             <a:off x="5855566" y="1242399"/>
-            <a:ext cx="5940193" cy="5280651"/>
+            <a:ext cx="5940193" cy="5280650"/>
           </a:xfrm>
           <a:prstGeom prst="rect">
             <a:avLst/>
@@ -31315,8 +32143,8 @@
           <a:lstStyle/>
           <a:p>
             <a:r>
-              <a:rPr lang="en-US"/>
-              <a:t>Name of lecturer, institute, date</a:t>
+              <a:rPr lang="de-DE"/>
+              <a:t>Malte Wegener, HLPW6 Mini-Workshop, 11.06.2026</a:t>
             </a:r>
             <a:endParaRPr lang="de-DE" dirty="0"/>
           </a:p>
@@ -31375,7 +32203,7 @@
           <a:p>
             <a:r>
               <a:rPr lang="en-US" dirty="0"/>
-              <a:t>Ideas (for a Vision) for dealing with multiple solutions</a:t>
+              <a:t>A Vision for dealing with multiple solutions</a:t>
             </a:r>
           </a:p>
         </p:txBody>
@@ -31408,6 +32236,17 @@
           <a:p>
             <a:r>
               <a:rPr lang="en-US" dirty="0"/>
+              <a:t>Robust RANS Models should allow for multiple solutions to capture Hysteresis </a:t>
+            </a:r>
+            <a:r>
+              <a:rPr lang="en-US" dirty="0" err="1"/>
+              <a:t>effectrs</a:t>
+            </a:r>
+            <a:endParaRPr lang="en-US" dirty="0"/>
+          </a:p>
+          <a:p>
+            <a:r>
+              <a:rPr lang="en-US" dirty="0"/>
               <a:t>Is there a physical condition these pizza slice solutions violate?</a:t>
             </a:r>
           </a:p>
@@ -31513,8 +32352,8 @@
           <a:lstStyle/>
           <a:p>
             <a:r>
-              <a:rPr lang="en-US" dirty="0"/>
-              <a:t>Name of lecturer, institute, date</a:t>
+              <a:rPr lang="de-DE"/>
+              <a:t>Malte Wegener, HLPW6 Mini-Workshop, 11.06.2026</a:t>
             </a:r>
             <a:endParaRPr lang="de-DE" dirty="0"/>
           </a:p>
@@ -32120,6 +32959,224 @@
                                   </p:childTnLst>
                                 </p:cTn>
                               </p:par>
+                              <p:par>
+                                <p:cTn id="11" presetID="1" presetClass="entr" presetSubtype="0" fill="hold" grpId="0" nodeType="withEffect">
+                                  <p:stCondLst>
+                                    <p:cond delay="0"/>
+                                  </p:stCondLst>
+                                  <p:childTnLst>
+                                    <p:set>
+                                      <p:cBhvr>
+                                        <p:cTn id="12" dur="1" fill="hold">
+                                          <p:stCondLst>
+                                            <p:cond delay="0"/>
+                                          </p:stCondLst>
+                                        </p:cTn>
+                                        <p:tgtEl>
+                                          <p:spTgt spid="3">
+                                            <p:txEl>
+                                              <p:pRg st="3" end="3"/>
+                                            </p:txEl>
+                                          </p:spTgt>
+                                        </p:tgtEl>
+                                        <p:attrNameLst>
+                                          <p:attrName>style.visibility</p:attrName>
+                                        </p:attrNameLst>
+                                      </p:cBhvr>
+                                      <p:to>
+                                        <p:strVal val="visible"/>
+                                      </p:to>
+                                    </p:set>
+                                  </p:childTnLst>
+                                </p:cTn>
+                              </p:par>
+                            </p:childTnLst>
+                          </p:cTn>
+                        </p:par>
+                      </p:childTnLst>
+                    </p:cTn>
+                  </p:par>
+                  <p:par>
+                    <p:cTn id="13" fill="hold">
+                      <p:stCondLst>
+                        <p:cond delay="indefinite"/>
+                      </p:stCondLst>
+                      <p:childTnLst>
+                        <p:par>
+                          <p:cTn id="14" fill="hold">
+                            <p:stCondLst>
+                              <p:cond delay="0"/>
+                            </p:stCondLst>
+                            <p:childTnLst>
+                              <p:par>
+                                <p:cTn id="15" presetID="1" presetClass="entr" presetSubtype="0" fill="hold" nodeType="clickEffect">
+                                  <p:stCondLst>
+                                    <p:cond delay="0"/>
+                                  </p:stCondLst>
+                                  <p:childTnLst>
+                                    <p:set>
+                                      <p:cBhvr>
+                                        <p:cTn id="16" dur="1" fill="hold">
+                                          <p:stCondLst>
+                                            <p:cond delay="0"/>
+                                          </p:stCondLst>
+                                        </p:cTn>
+                                        <p:tgtEl>
+                                          <p:spTgt spid="7">
+                                            <p:txEl>
+                                              <p:pRg st="0" end="0"/>
+                                            </p:txEl>
+                                          </p:spTgt>
+                                        </p:tgtEl>
+                                        <p:attrNameLst>
+                                          <p:attrName>style.visibility</p:attrName>
+                                        </p:attrNameLst>
+                                      </p:cBhvr>
+                                      <p:to>
+                                        <p:strVal val="visible"/>
+                                      </p:to>
+                                    </p:set>
+                                  </p:childTnLst>
+                                </p:cTn>
+                              </p:par>
+                              <p:par>
+                                <p:cTn id="17" presetID="1" presetClass="entr" presetSubtype="0" fill="hold" nodeType="withEffect">
+                                  <p:stCondLst>
+                                    <p:cond delay="0"/>
+                                  </p:stCondLst>
+                                  <p:childTnLst>
+                                    <p:set>
+                                      <p:cBhvr>
+                                        <p:cTn id="18" dur="1" fill="hold">
+                                          <p:stCondLst>
+                                            <p:cond delay="0"/>
+                                          </p:stCondLst>
+                                        </p:cTn>
+                                        <p:tgtEl>
+                                          <p:spTgt spid="7">
+                                            <p:txEl>
+                                              <p:pRg st="1" end="1"/>
+                                            </p:txEl>
+                                          </p:spTgt>
+                                        </p:tgtEl>
+                                        <p:attrNameLst>
+                                          <p:attrName>style.visibility</p:attrName>
+                                        </p:attrNameLst>
+                                      </p:cBhvr>
+                                      <p:to>
+                                        <p:strVal val="visible"/>
+                                      </p:to>
+                                    </p:set>
+                                  </p:childTnLst>
+                                </p:cTn>
+                              </p:par>
+                              <p:par>
+                                <p:cTn id="19" presetID="1" presetClass="entr" presetSubtype="0" fill="hold" nodeType="withEffect">
+                                  <p:stCondLst>
+                                    <p:cond delay="0"/>
+                                  </p:stCondLst>
+                                  <p:childTnLst>
+                                    <p:set>
+                                      <p:cBhvr>
+                                        <p:cTn id="20" dur="1" fill="hold">
+                                          <p:stCondLst>
+                                            <p:cond delay="0"/>
+                                          </p:stCondLst>
+                                        </p:cTn>
+                                        <p:tgtEl>
+                                          <p:spTgt spid="7">
+                                            <p:txEl>
+                                              <p:pRg st="2" end="2"/>
+                                            </p:txEl>
+                                          </p:spTgt>
+                                        </p:tgtEl>
+                                        <p:attrNameLst>
+                                          <p:attrName>style.visibility</p:attrName>
+                                        </p:attrNameLst>
+                                      </p:cBhvr>
+                                      <p:to>
+                                        <p:strVal val="visible"/>
+                                      </p:to>
+                                    </p:set>
+                                  </p:childTnLst>
+                                </p:cTn>
+                              </p:par>
+                              <p:par>
+                                <p:cTn id="21" presetID="1" presetClass="entr" presetSubtype="0" fill="hold" nodeType="withEffect">
+                                  <p:stCondLst>
+                                    <p:cond delay="0"/>
+                                  </p:stCondLst>
+                                  <p:childTnLst>
+                                    <p:set>
+                                      <p:cBhvr>
+                                        <p:cTn id="22" dur="1" fill="hold">
+                                          <p:stCondLst>
+                                            <p:cond delay="0"/>
+                                          </p:stCondLst>
+                                        </p:cTn>
+                                        <p:tgtEl>
+                                          <p:spTgt spid="7">
+                                            <p:txEl>
+                                              <p:pRg st="3" end="3"/>
+                                            </p:txEl>
+                                          </p:spTgt>
+                                        </p:tgtEl>
+                                        <p:attrNameLst>
+                                          <p:attrName>style.visibility</p:attrName>
+                                        </p:attrNameLst>
+                                      </p:cBhvr>
+                                      <p:to>
+                                        <p:strVal val="visible"/>
+                                      </p:to>
+                                    </p:set>
+                                  </p:childTnLst>
+                                </p:cTn>
+                              </p:par>
+                            </p:childTnLst>
+                          </p:cTn>
+                        </p:par>
+                      </p:childTnLst>
+                    </p:cTn>
+                  </p:par>
+                  <p:par>
+                    <p:cTn id="23" fill="hold">
+                      <p:stCondLst>
+                        <p:cond delay="indefinite"/>
+                      </p:stCondLst>
+                      <p:childTnLst>
+                        <p:par>
+                          <p:cTn id="24" fill="hold">
+                            <p:stCondLst>
+                              <p:cond delay="0"/>
+                            </p:stCondLst>
+                            <p:childTnLst>
+                              <p:par>
+                                <p:cTn id="25" presetID="1" presetClass="entr" presetSubtype="0" fill="hold" grpId="0" nodeType="clickEffect">
+                                  <p:stCondLst>
+                                    <p:cond delay="0"/>
+                                  </p:stCondLst>
+                                  <p:childTnLst>
+                                    <p:set>
+                                      <p:cBhvr>
+                                        <p:cTn id="26" dur="1" fill="hold">
+                                          <p:stCondLst>
+                                            <p:cond delay="0"/>
+                                          </p:stCondLst>
+                                        </p:cTn>
+                                        <p:tgtEl>
+                                          <p:spTgt spid="9"/>
+                                        </p:tgtEl>
+                                        <p:attrNameLst>
+                                          <p:attrName>style.visibility</p:attrName>
+                                        </p:attrNameLst>
+                                      </p:cBhvr>
+                                      <p:to>
+                                        <p:strVal val="visible"/>
+                                      </p:to>
+                                    </p:set>
+                                  </p:childTnLst>
+                                </p:cTn>
+                              </p:par>
                             </p:childTnLst>
                           </p:cTn>
                         </p:par>
@@ -32148,7 +33205,8 @@
       </p:par>
     </p:tnLst>
     <p:bldLst>
-      <p:bldP spid="3" grpId="0" build="p"/>
+      <p:bldP spid="3" grpId="0" uiExpand="1" build="p"/>
+      <p:bldP spid="9" grpId="0" animBg="1"/>
     </p:bldLst>
   </p:timing>
 </p:sld>
